--- a/Fall 2026/L01 - Introduction and Intelligent Agents/COMP469_Ch1_Ch2_Full_Lecture.pptx
+++ b/Fall 2026/L01 - Introduction and Intelligent Agents/COMP469_Ch1_Ch2_Full_Lecture.pptx
@@ -396,7 +396,7 @@
             <a:pPr indent="0" algn="r">
               <a:buNone/>
             </a:pPr>
-            <a:fld id="{0C78860C-FCE9-4E7B-A2C8-2C3D080682BF}" type="slidenum">
+            <a:fld id="{95758A1C-6370-4917-87F9-B538FEEFD855}" type="slidenum">
               <a:rPr lang="en-US" sz="1400" b="0" u="none" strike="noStrike">
                 <a:solidFill>
                   <a:srgbClr val="000000"/>
@@ -454,7 +454,7 @@
         <p:spPr>
           <a:xfrm>
             <a:off x="453600" y="1038960"/>
-            <a:ext cx="3630240" cy="2805120"/>
+            <a:ext cx="3629880" cy="2804760"/>
           </a:xfrm>
           <a:prstGeom prst="rect">
             <a:avLst/>
@@ -477,7 +477,7 @@
         <p:spPr>
           <a:xfrm>
             <a:off x="453600" y="4000320"/>
-            <a:ext cx="3630240" cy="3272400"/>
+            <a:ext cx="3629880" cy="3272040"/>
           </a:xfrm>
           <a:prstGeom prst="rect">
             <a:avLst/>
@@ -536,7 +536,7 @@
         <p:spPr>
           <a:xfrm>
             <a:off x="2570760" y="7895520"/>
-            <a:ext cx="1965960" cy="416160"/>
+            <a:ext cx="1965600" cy="415800"/>
           </a:xfrm>
           <a:prstGeom prst="rect">
             <a:avLst/>
@@ -580,7 +580,7 @@
                 <a:tab pos="0" algn="l"/>
               </a:tabLst>
             </a:pPr>
-            <a:fld id="{BCFC2ACD-BFA0-46A5-9022-FF7958076988}" type="slidenum">
+            <a:fld id="{0543CCBA-9736-4FF6-A923-3845E95536B1}" type="slidenum">
               <a:rPr lang="en-US" sz="1200" b="0" u="none" strike="noStrike">
                 <a:solidFill>
                   <a:schemeClr val="dk1"/>
@@ -638,7 +638,7 @@
         <p:spPr>
           <a:xfrm>
             <a:off x="685800" y="1143000"/>
-            <a:ext cx="5485680" cy="3085560"/>
+            <a:ext cx="5485320" cy="3085200"/>
           </a:xfrm>
           <a:prstGeom prst="rect">
             <a:avLst/>
@@ -661,7 +661,7 @@
         <p:spPr>
           <a:xfrm>
             <a:off x="685800" y="4400640"/>
-            <a:ext cx="5485680" cy="3599640"/>
+            <a:ext cx="5485320" cy="3599280"/>
           </a:xfrm>
           <a:prstGeom prst="rect">
             <a:avLst/>
@@ -703,7 +703,7 @@
         <p:spPr>
           <a:xfrm>
             <a:off x="3884760" y="8685360"/>
-            <a:ext cx="2971080" cy="457920"/>
+            <a:ext cx="2970720" cy="457560"/>
           </a:xfrm>
           <a:prstGeom prst="rect">
             <a:avLst/>
@@ -747,7 +747,7 @@
                 <a:tab pos="0" algn="l"/>
               </a:tabLst>
             </a:pPr>
-            <a:fld id="{01076549-8AAC-4445-AC77-5D0EA031D6C9}" type="slidenum">
+            <a:fld id="{4C3D38C9-23AA-4C7D-AE34-7CC98F9B4CC4}" type="slidenum">
               <a:rPr lang="en-US" sz="1200" b="0" u="none" strike="noStrike">
                 <a:solidFill>
                   <a:schemeClr val="dk1"/>
@@ -805,7 +805,7 @@
         <p:spPr>
           <a:xfrm>
             <a:off x="685800" y="1143000"/>
-            <a:ext cx="5485680" cy="3085560"/>
+            <a:ext cx="5485320" cy="3085200"/>
           </a:xfrm>
           <a:prstGeom prst="rect">
             <a:avLst/>
@@ -828,7 +828,7 @@
         <p:spPr>
           <a:xfrm>
             <a:off x="685800" y="4400640"/>
-            <a:ext cx="5485680" cy="3599640"/>
+            <a:ext cx="5485320" cy="3599280"/>
           </a:xfrm>
           <a:prstGeom prst="rect">
             <a:avLst/>
@@ -870,7 +870,7 @@
         <p:spPr>
           <a:xfrm>
             <a:off x="3884760" y="8685360"/>
-            <a:ext cx="2971080" cy="457920"/>
+            <a:ext cx="2970720" cy="457560"/>
           </a:xfrm>
           <a:prstGeom prst="rect">
             <a:avLst/>
@@ -914,7 +914,7 @@
                 <a:tab pos="0" algn="l"/>
               </a:tabLst>
             </a:pPr>
-            <a:fld id="{D2CC6BD5-135C-4EDD-9F2B-64482ADB55AE}" type="slidenum">
+            <a:fld id="{2FC23C36-1E03-47A3-9BF2-F747679AEE66}" type="slidenum">
               <a:rPr lang="en-US" sz="1200" b="0" u="none" strike="noStrike">
                 <a:solidFill>
                   <a:schemeClr val="dk1"/>
@@ -972,7 +972,7 @@
         <p:spPr>
           <a:xfrm>
             <a:off x="685800" y="1143000"/>
-            <a:ext cx="5485680" cy="3085560"/>
+            <a:ext cx="5485320" cy="3085200"/>
           </a:xfrm>
           <a:prstGeom prst="rect">
             <a:avLst/>
@@ -995,7 +995,7 @@
         <p:spPr>
           <a:xfrm>
             <a:off x="685800" y="4400640"/>
-            <a:ext cx="5485680" cy="3599640"/>
+            <a:ext cx="5485320" cy="3599280"/>
           </a:xfrm>
           <a:prstGeom prst="rect">
             <a:avLst/>
@@ -1037,7 +1037,7 @@
         <p:spPr>
           <a:xfrm>
             <a:off x="3884760" y="8685360"/>
-            <a:ext cx="2971080" cy="457920"/>
+            <a:ext cx="2970720" cy="457560"/>
           </a:xfrm>
           <a:prstGeom prst="rect">
             <a:avLst/>
@@ -1081,7 +1081,7 @@
                 <a:tab pos="0" algn="l"/>
               </a:tabLst>
             </a:pPr>
-            <a:fld id="{6ED29C79-357B-49CE-B6A4-136BA1822DED}" type="slidenum">
+            <a:fld id="{D1B06512-55B9-4095-8879-5DC38252FAAB}" type="slidenum">
               <a:rPr lang="en-US" sz="1200" b="0" u="none" strike="noStrike">
                 <a:solidFill>
                   <a:schemeClr val="dk1"/>
@@ -1139,7 +1139,7 @@
         <p:spPr>
           <a:xfrm>
             <a:off x="685800" y="1143000"/>
-            <a:ext cx="5485680" cy="3085560"/>
+            <a:ext cx="5485320" cy="3085200"/>
           </a:xfrm>
           <a:prstGeom prst="rect">
             <a:avLst/>
@@ -1162,7 +1162,7 @@
         <p:spPr>
           <a:xfrm>
             <a:off x="685800" y="4400640"/>
-            <a:ext cx="5485680" cy="3599640"/>
+            <a:ext cx="5485320" cy="3599280"/>
           </a:xfrm>
           <a:prstGeom prst="rect">
             <a:avLst/>
@@ -1204,7 +1204,7 @@
         <p:spPr>
           <a:xfrm>
             <a:off x="3884760" y="8685360"/>
-            <a:ext cx="2971080" cy="457920"/>
+            <a:ext cx="2970720" cy="457560"/>
           </a:xfrm>
           <a:prstGeom prst="rect">
             <a:avLst/>
@@ -1248,7 +1248,7 @@
                 <a:tab pos="0" algn="l"/>
               </a:tabLst>
             </a:pPr>
-            <a:fld id="{6B07588C-B185-4BBB-9BF1-32F9706150CE}" type="slidenum">
+            <a:fld id="{378DF327-E955-433E-84F6-870ED7A068AF}" type="slidenum">
               <a:rPr lang="en-US" sz="1200" b="0" u="none" strike="noStrike">
                 <a:solidFill>
                   <a:schemeClr val="dk1"/>
@@ -1306,7 +1306,7 @@
         <p:spPr>
           <a:xfrm>
             <a:off x="685800" y="1143000"/>
-            <a:ext cx="5485680" cy="3085560"/>
+            <a:ext cx="5485320" cy="3085200"/>
           </a:xfrm>
           <a:prstGeom prst="rect">
             <a:avLst/>
@@ -1329,7 +1329,7 @@
         <p:spPr>
           <a:xfrm>
             <a:off x="685800" y="4400640"/>
-            <a:ext cx="5485680" cy="3599640"/>
+            <a:ext cx="5485320" cy="3599280"/>
           </a:xfrm>
           <a:prstGeom prst="rect">
             <a:avLst/>
@@ -1371,7 +1371,7 @@
         <p:spPr>
           <a:xfrm>
             <a:off x="3884760" y="8685360"/>
-            <a:ext cx="2971080" cy="457920"/>
+            <a:ext cx="2970720" cy="457560"/>
           </a:xfrm>
           <a:prstGeom prst="rect">
             <a:avLst/>
@@ -1415,7 +1415,7 @@
                 <a:tab pos="0" algn="l"/>
               </a:tabLst>
             </a:pPr>
-            <a:fld id="{AB53033E-4FCF-4D47-B260-3D920B809AAF}" type="slidenum">
+            <a:fld id="{55B4A0E5-ACEC-49E8-B38A-68DCECE893EE}" type="slidenum">
               <a:rPr lang="en-US" sz="1200" b="0" u="none" strike="noStrike">
                 <a:solidFill>
                   <a:schemeClr val="dk1"/>
@@ -1473,7 +1473,7 @@
         <p:spPr>
           <a:xfrm>
             <a:off x="685800" y="1143000"/>
-            <a:ext cx="5485680" cy="3085560"/>
+            <a:ext cx="5485320" cy="3085200"/>
           </a:xfrm>
           <a:prstGeom prst="rect">
             <a:avLst/>
@@ -1496,7 +1496,7 @@
         <p:spPr>
           <a:xfrm>
             <a:off x="685800" y="4400640"/>
-            <a:ext cx="5485680" cy="3599640"/>
+            <a:ext cx="5485320" cy="3599280"/>
           </a:xfrm>
           <a:prstGeom prst="rect">
             <a:avLst/>
@@ -1538,7 +1538,7 @@
         <p:spPr>
           <a:xfrm>
             <a:off x="3884760" y="8685360"/>
-            <a:ext cx="2971080" cy="457920"/>
+            <a:ext cx="2970720" cy="457560"/>
           </a:xfrm>
           <a:prstGeom prst="rect">
             <a:avLst/>
@@ -1582,7 +1582,7 @@
                 <a:tab pos="0" algn="l"/>
               </a:tabLst>
             </a:pPr>
-            <a:fld id="{2D5D943B-7003-4D64-B0FF-1907B60B2133}" type="slidenum">
+            <a:fld id="{B83ADA59-6543-4318-9DEA-0D30843AC953}" type="slidenum">
               <a:rPr lang="en-US" sz="1200" b="0" u="none" strike="noStrike">
                 <a:solidFill>
                   <a:schemeClr val="dk1"/>
@@ -1640,7 +1640,7 @@
         <p:spPr>
           <a:xfrm>
             <a:off x="685800" y="1143000"/>
-            <a:ext cx="5485680" cy="3085560"/>
+            <a:ext cx="5485320" cy="3085200"/>
           </a:xfrm>
           <a:prstGeom prst="rect">
             <a:avLst/>
@@ -1663,7 +1663,7 @@
         <p:spPr>
           <a:xfrm>
             <a:off x="685800" y="4400640"/>
-            <a:ext cx="5485680" cy="3599640"/>
+            <a:ext cx="5485320" cy="3599280"/>
           </a:xfrm>
           <a:prstGeom prst="rect">
             <a:avLst/>
@@ -1705,7 +1705,7 @@
         <p:spPr>
           <a:xfrm>
             <a:off x="3884760" y="8685360"/>
-            <a:ext cx="2971080" cy="457920"/>
+            <a:ext cx="2970720" cy="457560"/>
           </a:xfrm>
           <a:prstGeom prst="rect">
             <a:avLst/>
@@ -1749,7 +1749,7 @@
                 <a:tab pos="0" algn="l"/>
               </a:tabLst>
             </a:pPr>
-            <a:fld id="{C9069C54-03B8-4B95-B714-76098298574E}" type="slidenum">
+            <a:fld id="{0C987D5E-CB90-482E-841F-0C4AAFCC36A7}" type="slidenum">
               <a:rPr lang="en-US" sz="1200" b="0" u="none" strike="noStrike">
                 <a:solidFill>
                   <a:schemeClr val="dk1"/>
@@ -1807,7 +1807,7 @@
         <p:spPr>
           <a:xfrm>
             <a:off x="685800" y="1143000"/>
-            <a:ext cx="5485680" cy="3085560"/>
+            <a:ext cx="5485320" cy="3085200"/>
           </a:xfrm>
           <a:prstGeom prst="rect">
             <a:avLst/>
@@ -1830,7 +1830,7 @@
         <p:spPr>
           <a:xfrm>
             <a:off x="685800" y="4400640"/>
-            <a:ext cx="5485680" cy="3599640"/>
+            <a:ext cx="5485320" cy="3599280"/>
           </a:xfrm>
           <a:prstGeom prst="rect">
             <a:avLst/>
@@ -1872,7 +1872,7 @@
         <p:spPr>
           <a:xfrm>
             <a:off x="3884760" y="8685360"/>
-            <a:ext cx="2971080" cy="457920"/>
+            <a:ext cx="2970720" cy="457560"/>
           </a:xfrm>
           <a:prstGeom prst="rect">
             <a:avLst/>
@@ -1916,7 +1916,7 @@
                 <a:tab pos="0" algn="l"/>
               </a:tabLst>
             </a:pPr>
-            <a:fld id="{7BD21E70-9C6C-4AB2-A066-5E045A2EA1A8}" type="slidenum">
+            <a:fld id="{9E30F675-0A12-4415-A552-55160B377D3A}" type="slidenum">
               <a:rPr lang="en-US" sz="1200" b="0" u="none" strike="noStrike">
                 <a:solidFill>
                   <a:schemeClr val="dk1"/>
@@ -1974,7 +1974,7 @@
         <p:spPr>
           <a:xfrm>
             <a:off x="685800" y="1143000"/>
-            <a:ext cx="5485680" cy="3085560"/>
+            <a:ext cx="5485320" cy="3085200"/>
           </a:xfrm>
           <a:prstGeom prst="rect">
             <a:avLst/>
@@ -1997,7 +1997,7 @@
         <p:spPr>
           <a:xfrm>
             <a:off x="685800" y="4400640"/>
-            <a:ext cx="5485680" cy="3599640"/>
+            <a:ext cx="5485320" cy="3599280"/>
           </a:xfrm>
           <a:prstGeom prst="rect">
             <a:avLst/>
@@ -2039,7 +2039,7 @@
         <p:spPr>
           <a:xfrm>
             <a:off x="3884760" y="8685360"/>
-            <a:ext cx="2971080" cy="457920"/>
+            <a:ext cx="2970720" cy="457560"/>
           </a:xfrm>
           <a:prstGeom prst="rect">
             <a:avLst/>
@@ -2083,7 +2083,7 @@
                 <a:tab pos="0" algn="l"/>
               </a:tabLst>
             </a:pPr>
-            <a:fld id="{70A80178-FFBC-49FE-B906-1C902FB0A569}" type="slidenum">
+            <a:fld id="{0FAEC410-C90B-4058-8DA4-15215BFB4E06}" type="slidenum">
               <a:rPr lang="en-US" sz="1200" b="0" u="none" strike="noStrike">
                 <a:solidFill>
                   <a:schemeClr val="dk1"/>
@@ -2141,7 +2141,7 @@
         <p:spPr>
           <a:xfrm>
             <a:off x="685800" y="1143000"/>
-            <a:ext cx="5485680" cy="3085560"/>
+            <a:ext cx="5485320" cy="3085200"/>
           </a:xfrm>
           <a:prstGeom prst="rect">
             <a:avLst/>
@@ -2164,7 +2164,7 @@
         <p:spPr>
           <a:xfrm>
             <a:off x="685800" y="4400640"/>
-            <a:ext cx="5485680" cy="3599640"/>
+            <a:ext cx="5485320" cy="3599280"/>
           </a:xfrm>
           <a:prstGeom prst="rect">
             <a:avLst/>
@@ -2206,7 +2206,7 @@
         <p:spPr>
           <a:xfrm>
             <a:off x="3884760" y="8685360"/>
-            <a:ext cx="2971080" cy="457920"/>
+            <a:ext cx="2970720" cy="457560"/>
           </a:xfrm>
           <a:prstGeom prst="rect">
             <a:avLst/>
@@ -2250,7 +2250,7 @@
                 <a:tab pos="0" algn="l"/>
               </a:tabLst>
             </a:pPr>
-            <a:fld id="{D14B7BEC-64D2-4C11-936F-5CBCD67EA5AC}" type="slidenum">
+            <a:fld id="{1F8B2D71-D91F-409A-A105-8E24E234B6AC}" type="slidenum">
               <a:rPr lang="en-US" sz="1200" b="0" u="none" strike="noStrike">
                 <a:solidFill>
                   <a:schemeClr val="dk1"/>
@@ -2308,7 +2308,7 @@
         <p:spPr>
           <a:xfrm>
             <a:off x="685800" y="1143000"/>
-            <a:ext cx="5485680" cy="3085560"/>
+            <a:ext cx="5485320" cy="3085200"/>
           </a:xfrm>
           <a:prstGeom prst="rect">
             <a:avLst/>
@@ -2331,7 +2331,7 @@
         <p:spPr>
           <a:xfrm>
             <a:off x="685800" y="4400640"/>
-            <a:ext cx="5485680" cy="3599640"/>
+            <a:ext cx="5485320" cy="3599280"/>
           </a:xfrm>
           <a:prstGeom prst="rect">
             <a:avLst/>
@@ -2373,7 +2373,7 @@
         <p:spPr>
           <a:xfrm>
             <a:off x="3884760" y="8685360"/>
-            <a:ext cx="2971080" cy="457920"/>
+            <a:ext cx="2970720" cy="457560"/>
           </a:xfrm>
           <a:prstGeom prst="rect">
             <a:avLst/>
@@ -2417,7 +2417,7 @@
                 <a:tab pos="0" algn="l"/>
               </a:tabLst>
             </a:pPr>
-            <a:fld id="{A6F2ED66-9468-4A7F-B69B-25F77AF3AA5A}" type="slidenum">
+            <a:fld id="{967CDBE3-B3BE-4F17-A373-6A409C7963F3}" type="slidenum">
               <a:rPr lang="en-US" sz="1200" b="0" u="none" strike="noStrike">
                 <a:solidFill>
                   <a:schemeClr val="dk1"/>
@@ -2475,7 +2475,7 @@
         <p:spPr>
           <a:xfrm>
             <a:off x="685800" y="1143000"/>
-            <a:ext cx="5485680" cy="3085560"/>
+            <a:ext cx="5485320" cy="3085200"/>
           </a:xfrm>
           <a:prstGeom prst="rect">
             <a:avLst/>
@@ -2498,7 +2498,7 @@
         <p:spPr>
           <a:xfrm>
             <a:off x="685800" y="4400640"/>
-            <a:ext cx="5485680" cy="3599640"/>
+            <a:ext cx="5485320" cy="3599280"/>
           </a:xfrm>
           <a:prstGeom prst="rect">
             <a:avLst/>
@@ -2540,7 +2540,7 @@
         <p:spPr>
           <a:xfrm>
             <a:off x="3884760" y="8685360"/>
-            <a:ext cx="2971080" cy="457920"/>
+            <a:ext cx="2970720" cy="457560"/>
           </a:xfrm>
           <a:prstGeom prst="rect">
             <a:avLst/>
@@ -2584,7 +2584,7 @@
                 <a:tab pos="0" algn="l"/>
               </a:tabLst>
             </a:pPr>
-            <a:fld id="{B92B4D13-20FC-4447-9D78-10FF6DC8A052}" type="slidenum">
+            <a:fld id="{CEB0E0D7-228C-4F56-B51D-6438A92DEFA4}" type="slidenum">
               <a:rPr lang="en-US" sz="1200" b="0" u="none" strike="noStrike">
                 <a:solidFill>
                   <a:schemeClr val="dk1"/>
@@ -2642,7 +2642,7 @@
         <p:spPr>
           <a:xfrm>
             <a:off x="685800" y="1143000"/>
-            <a:ext cx="5485680" cy="3085560"/>
+            <a:ext cx="5485320" cy="3085200"/>
           </a:xfrm>
           <a:prstGeom prst="rect">
             <a:avLst/>
@@ -2665,7 +2665,7 @@
         <p:spPr>
           <a:xfrm>
             <a:off x="685800" y="4400640"/>
-            <a:ext cx="5485680" cy="3599640"/>
+            <a:ext cx="5485320" cy="3599280"/>
           </a:xfrm>
           <a:prstGeom prst="rect">
             <a:avLst/>
@@ -2707,7 +2707,7 @@
         <p:spPr>
           <a:xfrm>
             <a:off x="3884760" y="8685360"/>
-            <a:ext cx="2971080" cy="457920"/>
+            <a:ext cx="2970720" cy="457560"/>
           </a:xfrm>
           <a:prstGeom prst="rect">
             <a:avLst/>
@@ -2751,7 +2751,7 @@
                 <a:tab pos="0" algn="l"/>
               </a:tabLst>
             </a:pPr>
-            <a:fld id="{2FC3A492-0EA5-47A8-B3F6-DF42DC388428}" type="slidenum">
+            <a:fld id="{D1598D02-AFA7-4E43-8C99-A2507CA6E098}" type="slidenum">
               <a:rPr lang="en-US" sz="1200" b="0" u="none" strike="noStrike">
                 <a:solidFill>
                   <a:schemeClr val="dk1"/>
@@ -2809,7 +2809,7 @@
         <p:spPr>
           <a:xfrm>
             <a:off x="685800" y="1143000"/>
-            <a:ext cx="5485680" cy="3085560"/>
+            <a:ext cx="5485320" cy="3085200"/>
           </a:xfrm>
           <a:prstGeom prst="rect">
             <a:avLst/>
@@ -2832,7 +2832,7 @@
         <p:spPr>
           <a:xfrm>
             <a:off x="685800" y="4400640"/>
-            <a:ext cx="5485680" cy="3599640"/>
+            <a:ext cx="5485320" cy="3599280"/>
           </a:xfrm>
           <a:prstGeom prst="rect">
             <a:avLst/>
@@ -2874,7 +2874,7 @@
         <p:spPr>
           <a:xfrm>
             <a:off x="3884760" y="8685360"/>
-            <a:ext cx="2971080" cy="457920"/>
+            <a:ext cx="2970720" cy="457560"/>
           </a:xfrm>
           <a:prstGeom prst="rect">
             <a:avLst/>
@@ -2918,7 +2918,7 @@
                 <a:tab pos="0" algn="l"/>
               </a:tabLst>
             </a:pPr>
-            <a:fld id="{670497F4-5F72-464D-9E7B-AA21675D49A3}" type="slidenum">
+            <a:fld id="{88883F02-DE54-40FE-A4B9-24CE9F9FBA9D}" type="slidenum">
               <a:rPr lang="en-US" sz="1200" b="0" u="none" strike="noStrike">
                 <a:solidFill>
                   <a:schemeClr val="dk1"/>
@@ -2976,7 +2976,7 @@
         <p:spPr>
           <a:xfrm>
             <a:off x="685800" y="1143000"/>
-            <a:ext cx="5485680" cy="3085560"/>
+            <a:ext cx="5485320" cy="3085200"/>
           </a:xfrm>
           <a:prstGeom prst="rect">
             <a:avLst/>
@@ -2999,7 +2999,7 @@
         <p:spPr>
           <a:xfrm>
             <a:off x="685800" y="4400640"/>
-            <a:ext cx="5485680" cy="3599640"/>
+            <a:ext cx="5485320" cy="3599280"/>
           </a:xfrm>
           <a:prstGeom prst="rect">
             <a:avLst/>
@@ -3041,7 +3041,7 @@
         <p:spPr>
           <a:xfrm>
             <a:off x="3884760" y="8685360"/>
-            <a:ext cx="2971080" cy="457920"/>
+            <a:ext cx="2970720" cy="457560"/>
           </a:xfrm>
           <a:prstGeom prst="rect">
             <a:avLst/>
@@ -3085,7 +3085,7 @@
                 <a:tab pos="0" algn="l"/>
               </a:tabLst>
             </a:pPr>
-            <a:fld id="{20DAF0DD-D43B-4DE6-9D32-7493C930D24B}" type="slidenum">
+            <a:fld id="{A15C0C74-2999-4134-822D-5371A81A76A2}" type="slidenum">
               <a:rPr lang="en-US" sz="1200" b="0" u="none" strike="noStrike">
                 <a:solidFill>
                   <a:schemeClr val="dk1"/>
@@ -3143,7 +3143,7 @@
         <p:spPr>
           <a:xfrm>
             <a:off x="685800" y="1143000"/>
-            <a:ext cx="5485680" cy="3085560"/>
+            <a:ext cx="5485320" cy="3085200"/>
           </a:xfrm>
           <a:prstGeom prst="rect">
             <a:avLst/>
@@ -3166,7 +3166,7 @@
         <p:spPr>
           <a:xfrm>
             <a:off x="685800" y="4400640"/>
-            <a:ext cx="5485680" cy="3599640"/>
+            <a:ext cx="5485320" cy="3599280"/>
           </a:xfrm>
           <a:prstGeom prst="rect">
             <a:avLst/>
@@ -3208,7 +3208,7 @@
         <p:spPr>
           <a:xfrm>
             <a:off x="3884760" y="8685360"/>
-            <a:ext cx="2971080" cy="457920"/>
+            <a:ext cx="2970720" cy="457560"/>
           </a:xfrm>
           <a:prstGeom prst="rect">
             <a:avLst/>
@@ -3252,7 +3252,7 @@
                 <a:tab pos="0" algn="l"/>
               </a:tabLst>
             </a:pPr>
-            <a:fld id="{47CDA70D-6BAA-469A-9EC3-F1038F498573}" type="slidenum">
+            <a:fld id="{FBC93CAA-C59C-4BFD-BE59-F3FF5CBD0F56}" type="slidenum">
               <a:rPr lang="en-US" sz="1200" b="0" u="none" strike="noStrike">
                 <a:solidFill>
                   <a:schemeClr val="dk1"/>
@@ -3310,7 +3310,7 @@
         <p:spPr>
           <a:xfrm>
             <a:off x="685800" y="1143000"/>
-            <a:ext cx="5485680" cy="3085560"/>
+            <a:ext cx="5485320" cy="3085200"/>
           </a:xfrm>
           <a:prstGeom prst="rect">
             <a:avLst/>
@@ -3333,7 +3333,7 @@
         <p:spPr>
           <a:xfrm>
             <a:off x="685800" y="4400640"/>
-            <a:ext cx="5485680" cy="3599640"/>
+            <a:ext cx="5485320" cy="3599280"/>
           </a:xfrm>
           <a:prstGeom prst="rect">
             <a:avLst/>
@@ -3375,7 +3375,7 @@
         <p:spPr>
           <a:xfrm>
             <a:off x="3884760" y="8685360"/>
-            <a:ext cx="2971080" cy="457920"/>
+            <a:ext cx="2970720" cy="457560"/>
           </a:xfrm>
           <a:prstGeom prst="rect">
             <a:avLst/>
@@ -3419,7 +3419,7 @@
                 <a:tab pos="0" algn="l"/>
               </a:tabLst>
             </a:pPr>
-            <a:fld id="{4E354DE4-736E-4854-B74D-F4433B16AA57}" type="slidenum">
+            <a:fld id="{68C5E4BA-36AB-4ED5-972C-267BB50DB361}" type="slidenum">
               <a:rPr lang="en-US" sz="1200" b="0" u="none" strike="noStrike">
                 <a:solidFill>
                   <a:schemeClr val="dk1"/>
@@ -3477,7 +3477,7 @@
         <p:spPr>
           <a:xfrm>
             <a:off x="685800" y="1143000"/>
-            <a:ext cx="5485680" cy="3085560"/>
+            <a:ext cx="5485320" cy="3085200"/>
           </a:xfrm>
           <a:prstGeom prst="rect">
             <a:avLst/>
@@ -3500,7 +3500,7 @@
         <p:spPr>
           <a:xfrm>
             <a:off x="685800" y="4400640"/>
-            <a:ext cx="5485680" cy="3599640"/>
+            <a:ext cx="5485320" cy="3599280"/>
           </a:xfrm>
           <a:prstGeom prst="rect">
             <a:avLst/>
@@ -3542,7 +3542,7 @@
         <p:spPr>
           <a:xfrm>
             <a:off x="3884760" y="8685360"/>
-            <a:ext cx="2971080" cy="457920"/>
+            <a:ext cx="2970720" cy="457560"/>
           </a:xfrm>
           <a:prstGeom prst="rect">
             <a:avLst/>
@@ -3586,7 +3586,7 @@
                 <a:tab pos="0" algn="l"/>
               </a:tabLst>
             </a:pPr>
-            <a:fld id="{4B849DD2-22E7-49A5-AC23-ACBBE31419FC}" type="slidenum">
+            <a:fld id="{09AFCEB9-41BC-4BC7-A92A-F7C94EB6F5FE}" type="slidenum">
               <a:rPr lang="en-US" sz="1200" b="0" u="none" strike="noStrike">
                 <a:solidFill>
                   <a:schemeClr val="dk1"/>
@@ -3644,7 +3644,7 @@
         <p:spPr>
           <a:xfrm>
             <a:off x="685800" y="1143000"/>
-            <a:ext cx="5485680" cy="3085560"/>
+            <a:ext cx="5485320" cy="3085200"/>
           </a:xfrm>
           <a:prstGeom prst="rect">
             <a:avLst/>
@@ -3667,7 +3667,7 @@
         <p:spPr>
           <a:xfrm>
             <a:off x="685800" y="4400640"/>
-            <a:ext cx="5485680" cy="3599640"/>
+            <a:ext cx="5485320" cy="3599280"/>
           </a:xfrm>
           <a:prstGeom prst="rect">
             <a:avLst/>
@@ -3709,7 +3709,7 @@
         <p:spPr>
           <a:xfrm>
             <a:off x="3884760" y="8685360"/>
-            <a:ext cx="2971080" cy="457920"/>
+            <a:ext cx="2970720" cy="457560"/>
           </a:xfrm>
           <a:prstGeom prst="rect">
             <a:avLst/>
@@ -3753,7 +3753,7 @@
                 <a:tab pos="0" algn="l"/>
               </a:tabLst>
             </a:pPr>
-            <a:fld id="{F801B974-1744-4296-AB44-89AB9D33C239}" type="slidenum">
+            <a:fld id="{9991DF17-6799-4566-B80C-205DC2C4B024}" type="slidenum">
               <a:rPr lang="en-US" sz="1200" b="0" u="none" strike="noStrike">
                 <a:solidFill>
                   <a:schemeClr val="dk1"/>
@@ -3811,7 +3811,7 @@
         <p:spPr>
           <a:xfrm>
             <a:off x="685800" y="1143000"/>
-            <a:ext cx="5485680" cy="3085560"/>
+            <a:ext cx="5485320" cy="3085200"/>
           </a:xfrm>
           <a:prstGeom prst="rect">
             <a:avLst/>
@@ -3834,7 +3834,7 @@
         <p:spPr>
           <a:xfrm>
             <a:off x="685800" y="4400640"/>
-            <a:ext cx="5485680" cy="3599640"/>
+            <a:ext cx="5485320" cy="3599280"/>
           </a:xfrm>
           <a:prstGeom prst="rect">
             <a:avLst/>
@@ -3876,7 +3876,7 @@
         <p:spPr>
           <a:xfrm>
             <a:off x="3884760" y="8685360"/>
-            <a:ext cx="2971080" cy="457920"/>
+            <a:ext cx="2970720" cy="457560"/>
           </a:xfrm>
           <a:prstGeom prst="rect">
             <a:avLst/>
@@ -3920,7 +3920,7 @@
                 <a:tab pos="0" algn="l"/>
               </a:tabLst>
             </a:pPr>
-            <a:fld id="{56E02D6B-6ADE-473F-A288-B1C033B49EF3}" type="slidenum">
+            <a:fld id="{B1FC80D2-F959-4A27-B1AE-EAB59651A91A}" type="slidenum">
               <a:rPr lang="en-US" sz="1200" b="0" u="none" strike="noStrike">
                 <a:solidFill>
                   <a:schemeClr val="dk1"/>
@@ -3978,7 +3978,7 @@
         <p:spPr>
           <a:xfrm>
             <a:off x="685800" y="1143000"/>
-            <a:ext cx="5485680" cy="3085560"/>
+            <a:ext cx="5485320" cy="3085200"/>
           </a:xfrm>
           <a:prstGeom prst="rect">
             <a:avLst/>
@@ -4001,7 +4001,7 @@
         <p:spPr>
           <a:xfrm>
             <a:off x="685800" y="4400640"/>
-            <a:ext cx="5485680" cy="3599640"/>
+            <a:ext cx="5485320" cy="3599280"/>
           </a:xfrm>
           <a:prstGeom prst="rect">
             <a:avLst/>
@@ -4043,7 +4043,7 @@
         <p:spPr>
           <a:xfrm>
             <a:off x="3884760" y="8685360"/>
-            <a:ext cx="2971080" cy="457920"/>
+            <a:ext cx="2970720" cy="457560"/>
           </a:xfrm>
           <a:prstGeom prst="rect">
             <a:avLst/>
@@ -4087,7 +4087,7 @@
                 <a:tab pos="0" algn="l"/>
               </a:tabLst>
             </a:pPr>
-            <a:fld id="{9783FD13-37B7-40F5-8755-8D4AC7370FF5}" type="slidenum">
+            <a:fld id="{07BFE269-A081-4ED6-AC38-3775D08AB730}" type="slidenum">
               <a:rPr lang="en-US" sz="1200" b="0" u="none" strike="noStrike">
                 <a:solidFill>
                   <a:schemeClr val="dk1"/>
@@ -4097,7 +4097,7 @@
                 <a:latin typeface="+mn-lt"/>
                 <a:ea typeface="+mn-ea"/>
               </a:rPr>
-              <a:t>1</a:t>
+              <a:t>&lt;number&gt;</a:t>
             </a:fld>
             <a:endParaRPr lang="en-US" sz="1200" b="0" u="none" strike="noStrike">
               <a:solidFill>
@@ -4145,7 +4145,7 @@
         <p:spPr>
           <a:xfrm>
             <a:off x="685800" y="1143000"/>
-            <a:ext cx="5485680" cy="3085560"/>
+            <a:ext cx="5485320" cy="3085200"/>
           </a:xfrm>
           <a:prstGeom prst="rect">
             <a:avLst/>
@@ -4168,7 +4168,7 @@
         <p:spPr>
           <a:xfrm>
             <a:off x="685800" y="4400640"/>
-            <a:ext cx="5485680" cy="3599640"/>
+            <a:ext cx="5485320" cy="3599280"/>
           </a:xfrm>
           <a:prstGeom prst="rect">
             <a:avLst/>
@@ -4210,7 +4210,7 @@
         <p:spPr>
           <a:xfrm>
             <a:off x="3884760" y="8685360"/>
-            <a:ext cx="2971080" cy="457920"/>
+            <a:ext cx="2970720" cy="457560"/>
           </a:xfrm>
           <a:prstGeom prst="rect">
             <a:avLst/>
@@ -4254,7 +4254,7 @@
                 <a:tab pos="0" algn="l"/>
               </a:tabLst>
             </a:pPr>
-            <a:fld id="{24F0822E-C826-4502-9F78-E33A9015A568}" type="slidenum">
+            <a:fld id="{84AB0DB3-3768-4642-B0B7-E5B96BF1EADF}" type="slidenum">
               <a:rPr lang="en-US" sz="1200" b="0" u="none" strike="noStrike">
                 <a:solidFill>
                   <a:schemeClr val="dk1"/>
@@ -4312,7 +4312,7 @@
         <p:spPr>
           <a:xfrm>
             <a:off x="685800" y="1143000"/>
-            <a:ext cx="5485680" cy="3085560"/>
+            <a:ext cx="5485320" cy="3085200"/>
           </a:xfrm>
           <a:prstGeom prst="rect">
             <a:avLst/>
@@ -4335,7 +4335,7 @@
         <p:spPr>
           <a:xfrm>
             <a:off x="685800" y="4400640"/>
-            <a:ext cx="5485680" cy="3599640"/>
+            <a:ext cx="5485320" cy="3599280"/>
           </a:xfrm>
           <a:prstGeom prst="rect">
             <a:avLst/>
@@ -4377,7 +4377,7 @@
         <p:spPr>
           <a:xfrm>
             <a:off x="3884760" y="8685360"/>
-            <a:ext cx="2971080" cy="457920"/>
+            <a:ext cx="2970720" cy="457560"/>
           </a:xfrm>
           <a:prstGeom prst="rect">
             <a:avLst/>
@@ -4421,7 +4421,7 @@
                 <a:tab pos="0" algn="l"/>
               </a:tabLst>
             </a:pPr>
-            <a:fld id="{5AAE797E-B81B-4858-9A39-8A739041EC96}" type="slidenum">
+            <a:fld id="{DCE1EEED-6C11-4AF2-9CD4-DFA2E01985F4}" type="slidenum">
               <a:rPr lang="en-US" sz="1200" b="0" u="none" strike="noStrike">
                 <a:solidFill>
                   <a:schemeClr val="dk1"/>
@@ -4431,7 +4431,7 @@
                 <a:latin typeface="+mn-lt"/>
                 <a:ea typeface="+mn-ea"/>
               </a:rPr>
-              <a:t>1</a:t>
+              <a:t>&lt;number&gt;</a:t>
             </a:fld>
             <a:endParaRPr lang="en-US" sz="1200" b="0" u="none" strike="noStrike">
               <a:solidFill>
@@ -4479,7 +4479,7 @@
         <p:spPr>
           <a:xfrm>
             <a:off x="685800" y="1143000"/>
-            <a:ext cx="5485680" cy="3085560"/>
+            <a:ext cx="5485320" cy="3085200"/>
           </a:xfrm>
           <a:prstGeom prst="rect">
             <a:avLst/>
@@ -4502,7 +4502,7 @@
         <p:spPr>
           <a:xfrm>
             <a:off x="685800" y="4400640"/>
-            <a:ext cx="5485680" cy="3599640"/>
+            <a:ext cx="5485320" cy="3599280"/>
           </a:xfrm>
           <a:prstGeom prst="rect">
             <a:avLst/>
@@ -4544,7 +4544,7 @@
         <p:spPr>
           <a:xfrm>
             <a:off x="3884760" y="8685360"/>
-            <a:ext cx="2971080" cy="457920"/>
+            <a:ext cx="2970720" cy="457560"/>
           </a:xfrm>
           <a:prstGeom prst="rect">
             <a:avLst/>
@@ -4588,7 +4588,7 @@
                 <a:tab pos="0" algn="l"/>
               </a:tabLst>
             </a:pPr>
-            <a:fld id="{5C51E97F-4AEA-458B-B133-E12326810F95}" type="slidenum">
+            <a:fld id="{8FE9D977-4A5B-44B1-9E52-8B2020507FDB}" type="slidenum">
               <a:rPr lang="en-US" sz="1200" b="0" u="none" strike="noStrike">
                 <a:solidFill>
                   <a:schemeClr val="dk1"/>
@@ -4646,7 +4646,7 @@
         <p:spPr>
           <a:xfrm>
             <a:off x="685800" y="1143000"/>
-            <a:ext cx="5485680" cy="3085560"/>
+            <a:ext cx="5485320" cy="3085200"/>
           </a:xfrm>
           <a:prstGeom prst="rect">
             <a:avLst/>
@@ -4669,7 +4669,7 @@
         <p:spPr>
           <a:xfrm>
             <a:off x="685800" y="4400640"/>
-            <a:ext cx="5485680" cy="3599640"/>
+            <a:ext cx="5485320" cy="3599280"/>
           </a:xfrm>
           <a:prstGeom prst="rect">
             <a:avLst/>
@@ -4711,7 +4711,7 @@
         <p:spPr>
           <a:xfrm>
             <a:off x="3884760" y="8685360"/>
-            <a:ext cx="2971080" cy="457920"/>
+            <a:ext cx="2970720" cy="457560"/>
           </a:xfrm>
           <a:prstGeom prst="rect">
             <a:avLst/>
@@ -4755,7 +4755,7 @@
                 <a:tab pos="0" algn="l"/>
               </a:tabLst>
             </a:pPr>
-            <a:fld id="{4EDC88F0-0612-447E-99C6-31DC297087AB}" type="slidenum">
+            <a:fld id="{2315DA93-7AB2-45FD-AAC6-845FF369DAE0}" type="slidenum">
               <a:rPr lang="en-US" sz="1200" b="0" u="none" strike="noStrike">
                 <a:solidFill>
                   <a:schemeClr val="dk1"/>
@@ -4813,7 +4813,7 @@
         <p:spPr>
           <a:xfrm>
             <a:off x="685800" y="1143000"/>
-            <a:ext cx="5485680" cy="3085560"/>
+            <a:ext cx="5485320" cy="3085200"/>
           </a:xfrm>
           <a:prstGeom prst="rect">
             <a:avLst/>
@@ -4836,7 +4836,7 @@
         <p:spPr>
           <a:xfrm>
             <a:off x="685800" y="4400640"/>
-            <a:ext cx="5485680" cy="3599640"/>
+            <a:ext cx="5485320" cy="3599280"/>
           </a:xfrm>
           <a:prstGeom prst="rect">
             <a:avLst/>
@@ -4878,7 +4878,7 @@
         <p:spPr>
           <a:xfrm>
             <a:off x="3884760" y="8685360"/>
-            <a:ext cx="2971080" cy="457920"/>
+            <a:ext cx="2970720" cy="457560"/>
           </a:xfrm>
           <a:prstGeom prst="rect">
             <a:avLst/>
@@ -4922,7 +4922,7 @@
                 <a:tab pos="0" algn="l"/>
               </a:tabLst>
             </a:pPr>
-            <a:fld id="{929AD978-D180-4EF7-85CA-65090415701D}" type="slidenum">
+            <a:fld id="{E5B8AC9F-42C6-4755-9193-7F2010BCC72F}" type="slidenum">
               <a:rPr lang="en-US" sz="1200" b="0" u="none" strike="noStrike">
                 <a:solidFill>
                   <a:schemeClr val="dk1"/>
@@ -4980,7 +4980,7 @@
         <p:spPr>
           <a:xfrm>
             <a:off x="685800" y="1143000"/>
-            <a:ext cx="5485680" cy="3085560"/>
+            <a:ext cx="5485320" cy="3085200"/>
           </a:xfrm>
           <a:prstGeom prst="rect">
             <a:avLst/>
@@ -5003,7 +5003,7 @@
         <p:spPr>
           <a:xfrm>
             <a:off x="685800" y="4400640"/>
-            <a:ext cx="5485680" cy="3599640"/>
+            <a:ext cx="5485320" cy="3599280"/>
           </a:xfrm>
           <a:prstGeom prst="rect">
             <a:avLst/>
@@ -5019,8 +5019,22 @@
           </a:bodyPr>
           <a:p>
             <a:pPr indent="0" algn="l">
+              <a:lnSpc>
+                <a:spcPct val="100000"/>
+              </a:lnSpc>
               <a:buNone/>
             </a:pPr>
+            <a:r>
+              <a:rPr lang="en-US" sz="1800" b="0" u="none" strike="noStrike">
+                <a:solidFill>
+                  <a:srgbClr val="000000"/>
+                </a:solidFill>
+                <a:effectLst/>
+                <a:uFillTx/>
+                <a:latin typeface="Arial"/>
+              </a:rPr>
+              <a:t>This slide should be the history of AI, go over who history a bit better.</a:t>
+            </a:r>
             <a:endParaRPr lang="en-US" sz="1800" b="0" u="none" strike="noStrike">
               <a:solidFill>
                 <a:srgbClr val="000000"/>
@@ -5045,7 +5059,7 @@
         <p:spPr>
           <a:xfrm>
             <a:off x="3884760" y="8685360"/>
-            <a:ext cx="2971080" cy="457920"/>
+            <a:ext cx="2970720" cy="457560"/>
           </a:xfrm>
           <a:prstGeom prst="rect">
             <a:avLst/>
@@ -5089,7 +5103,7 @@
                 <a:tab pos="0" algn="l"/>
               </a:tabLst>
             </a:pPr>
-            <a:fld id="{99F887E1-2009-47A3-984D-B1113250B8DE}" type="slidenum">
+            <a:fld id="{4EA7DED0-AF5B-403A-9AE5-306DB3A43D0D}" type="slidenum">
               <a:rPr lang="en-US" sz="1200" b="0" u="none" strike="noStrike">
                 <a:solidFill>
                   <a:schemeClr val="dk1"/>
@@ -5147,7 +5161,7 @@
         <p:spPr>
           <a:xfrm>
             <a:off x="685800" y="1143000"/>
-            <a:ext cx="5485680" cy="3085560"/>
+            <a:ext cx="5485320" cy="3085200"/>
           </a:xfrm>
           <a:prstGeom prst="rect">
             <a:avLst/>
@@ -5170,7 +5184,7 @@
         <p:spPr>
           <a:xfrm>
             <a:off x="685800" y="4400640"/>
-            <a:ext cx="5485680" cy="3599640"/>
+            <a:ext cx="5485320" cy="3599280"/>
           </a:xfrm>
           <a:prstGeom prst="rect">
             <a:avLst/>
@@ -5212,7 +5226,7 @@
         <p:spPr>
           <a:xfrm>
             <a:off x="3884760" y="8685360"/>
-            <a:ext cx="2971080" cy="457920"/>
+            <a:ext cx="2970720" cy="457560"/>
           </a:xfrm>
           <a:prstGeom prst="rect">
             <a:avLst/>
@@ -5256,7 +5270,7 @@
                 <a:tab pos="0" algn="l"/>
               </a:tabLst>
             </a:pPr>
-            <a:fld id="{E879D32E-7BC4-4495-9B35-C7F352F8B6D8}" type="slidenum">
+            <a:fld id="{77E78968-4C9F-498B-BD0A-62C3148489EB}" type="slidenum">
               <a:rPr lang="en-US" sz="1200" b="0" u="none" strike="noStrike">
                 <a:solidFill>
                   <a:schemeClr val="dk1"/>
@@ -5314,7 +5328,7 @@
         <p:spPr>
           <a:xfrm>
             <a:off x="685800" y="1143000"/>
-            <a:ext cx="5485680" cy="3085560"/>
+            <a:ext cx="5485320" cy="3085200"/>
           </a:xfrm>
           <a:prstGeom prst="rect">
             <a:avLst/>
@@ -5337,7 +5351,7 @@
         <p:spPr>
           <a:xfrm>
             <a:off x="685800" y="4400640"/>
-            <a:ext cx="5485680" cy="3599640"/>
+            <a:ext cx="5485320" cy="3599280"/>
           </a:xfrm>
           <a:prstGeom prst="rect">
             <a:avLst/>
@@ -5379,7 +5393,7 @@
         <p:spPr>
           <a:xfrm>
             <a:off x="3884760" y="8685360"/>
-            <a:ext cx="2971080" cy="457920"/>
+            <a:ext cx="2970720" cy="457560"/>
           </a:xfrm>
           <a:prstGeom prst="rect">
             <a:avLst/>
@@ -5423,7 +5437,7 @@
                 <a:tab pos="0" algn="l"/>
               </a:tabLst>
             </a:pPr>
-            <a:fld id="{E202943C-61DA-4C1B-B9E7-E7A039DC5E23}" type="slidenum">
+            <a:fld id="{27768797-1960-4391-9D48-ADFBB03B39DC}" type="slidenum">
               <a:rPr lang="en-US" sz="1200" b="0" u="none" strike="noStrike">
                 <a:solidFill>
                   <a:schemeClr val="dk1"/>
@@ -5481,7 +5495,7 @@
         <p:spPr>
           <a:xfrm>
             <a:off x="685800" y="1143000"/>
-            <a:ext cx="5485680" cy="3085560"/>
+            <a:ext cx="5485320" cy="3085200"/>
           </a:xfrm>
           <a:prstGeom prst="rect">
             <a:avLst/>
@@ -5504,7 +5518,7 @@
         <p:spPr>
           <a:xfrm>
             <a:off x="685800" y="4400640"/>
-            <a:ext cx="5485680" cy="3599640"/>
+            <a:ext cx="5485320" cy="3599280"/>
           </a:xfrm>
           <a:prstGeom prst="rect">
             <a:avLst/>
@@ -5546,7 +5560,7 @@
         <p:spPr>
           <a:xfrm>
             <a:off x="3884760" y="8685360"/>
-            <a:ext cx="2971080" cy="457920"/>
+            <a:ext cx="2970720" cy="457560"/>
           </a:xfrm>
           <a:prstGeom prst="rect">
             <a:avLst/>
@@ -5590,7 +5604,7 @@
                 <a:tab pos="0" algn="l"/>
               </a:tabLst>
             </a:pPr>
-            <a:fld id="{C524171F-6274-4611-8D58-35E21C2950B6}" type="slidenum">
+            <a:fld id="{83DD94ED-DF3F-444E-A80D-3C81655A5CF8}" type="slidenum">
               <a:rPr lang="en-US" sz="1200" b="0" u="none" strike="noStrike">
                 <a:solidFill>
                   <a:schemeClr val="dk1"/>
@@ -5648,7 +5662,7 @@
         <p:spPr>
           <a:xfrm>
             <a:off x="685800" y="1143000"/>
-            <a:ext cx="5485680" cy="3085560"/>
+            <a:ext cx="5485320" cy="3085200"/>
           </a:xfrm>
           <a:prstGeom prst="rect">
             <a:avLst/>
@@ -5671,7 +5685,7 @@
         <p:spPr>
           <a:xfrm>
             <a:off x="685800" y="4400640"/>
-            <a:ext cx="5485680" cy="3599640"/>
+            <a:ext cx="5485320" cy="3599280"/>
           </a:xfrm>
           <a:prstGeom prst="rect">
             <a:avLst/>
@@ -5713,7 +5727,7 @@
         <p:spPr>
           <a:xfrm>
             <a:off x="3884760" y="8685360"/>
-            <a:ext cx="2971080" cy="457920"/>
+            <a:ext cx="2970720" cy="457560"/>
           </a:xfrm>
           <a:prstGeom prst="rect">
             <a:avLst/>
@@ -5757,7 +5771,7 @@
                 <a:tab pos="0" algn="l"/>
               </a:tabLst>
             </a:pPr>
-            <a:fld id="{A3DD5F9F-80D8-4134-A2F6-17D45052120D}" type="slidenum">
+            <a:fld id="{009F8527-EAC1-4C87-9E0E-3A54F96AEAAA}" type="slidenum">
               <a:rPr lang="en-US" sz="1200" b="0" u="none" strike="noStrike">
                 <a:solidFill>
                   <a:schemeClr val="dk1"/>
@@ -5822,7 +5836,7 @@
         <p:spPr>
           <a:xfrm>
             <a:off x="457200" y="496800"/>
-            <a:ext cx="8228880" cy="274680"/>
+            <a:ext cx="8228520" cy="274680"/>
           </a:xfrm>
           <a:prstGeom prst="rect">
             <a:avLst/>
@@ -5838,6 +5852,9 @@
           </a:bodyPr>
           <a:lstStyle>
             <a:lvl1pPr indent="0" algn="l">
+              <a:lnSpc>
+                <a:spcPct val="100000"/>
+              </a:lnSpc>
               <a:buNone/>
               <a:tabLst>
                 <a:tab pos="0" algn="l"/>
@@ -5854,6 +5871,9 @@
           </a:lstStyle>
           <a:p>
             <a:pPr indent="0" algn="l">
+              <a:lnSpc>
+                <a:spcPct val="100000"/>
+              </a:lnSpc>
               <a:buNone/>
               <a:tabLst>
                 <a:tab pos="0" algn="l"/>
@@ -5923,7 +5943,7 @@
         <p:spPr>
           <a:xfrm>
             <a:off x="457200" y="205200"/>
-            <a:ext cx="8229240" cy="858600"/>
+            <a:ext cx="8228880" cy="858240"/>
           </a:xfrm>
           <a:prstGeom prst="rect">
             <a:avLst/>
@@ -5939,6 +5959,9 @@
           </a:bodyPr>
           <a:lstStyle>
             <a:lvl1pPr indent="0" algn="l">
+              <a:lnSpc>
+                <a:spcPct val="100000"/>
+              </a:lnSpc>
               <a:buNone/>
               <a:tabLst>
                 <a:tab pos="0" algn="l"/>
@@ -5955,6 +5978,9 @@
           </a:lstStyle>
           <a:p>
             <a:pPr indent="0" algn="l">
+              <a:lnSpc>
+                <a:spcPct val="100000"/>
+              </a:lnSpc>
               <a:buNone/>
               <a:tabLst>
                 <a:tab pos="0" algn="l"/>
@@ -5995,7 +6021,7 @@
         <p:spPr>
           <a:xfrm>
             <a:off x="457200" y="1203480"/>
-            <a:ext cx="8229240" cy="2982960"/>
+            <a:ext cx="8228880" cy="2982600"/>
           </a:xfrm>
           <a:prstGeom prst="rect">
             <a:avLst/>
@@ -6011,6 +6037,9 @@
           </a:bodyPr>
           <a:lstStyle>
             <a:lvl1pPr algn="l">
+              <a:lnSpc>
+                <a:spcPct val="100000"/>
+              </a:lnSpc>
               <a:spcBef>
                 <a:spcPts val="1417"/>
               </a:spcBef>
@@ -6030,6 +6059,9 @@
               </a:defRPr>
             </a:lvl1pPr>
             <a:lvl2pPr lvl="1" algn="l">
+              <a:lnSpc>
+                <a:spcPct val="100000"/>
+              </a:lnSpc>
               <a:spcBef>
                 <a:spcPts val="1134"/>
               </a:spcBef>
@@ -6049,6 +6081,9 @@
               </a:defRPr>
             </a:lvl2pPr>
             <a:lvl3pPr lvl="2" algn="l">
+              <a:lnSpc>
+                <a:spcPct val="100000"/>
+              </a:lnSpc>
               <a:spcBef>
                 <a:spcPts val="850"/>
               </a:spcBef>
@@ -6068,6 +6103,9 @@
               </a:defRPr>
             </a:lvl3pPr>
             <a:lvl4pPr lvl="3" algn="l">
+              <a:lnSpc>
+                <a:spcPct val="100000"/>
+              </a:lnSpc>
               <a:spcBef>
                 <a:spcPts val="567"/>
               </a:spcBef>
@@ -6087,6 +6125,9 @@
               </a:defRPr>
             </a:lvl4pPr>
             <a:lvl5pPr lvl="4" algn="l">
+              <a:lnSpc>
+                <a:spcPct val="100000"/>
+              </a:lnSpc>
               <a:spcBef>
                 <a:spcPts val="283"/>
               </a:spcBef>
@@ -6106,6 +6147,9 @@
               </a:defRPr>
             </a:lvl5pPr>
             <a:lvl6pPr lvl="5" algn="l">
+              <a:lnSpc>
+                <a:spcPct val="100000"/>
+              </a:lnSpc>
               <a:spcBef>
                 <a:spcPts val="283"/>
               </a:spcBef>
@@ -6125,6 +6169,9 @@
               </a:defRPr>
             </a:lvl6pPr>
             <a:lvl7pPr lvl="6" algn="l">
+              <a:lnSpc>
+                <a:spcPct val="100000"/>
+              </a:lnSpc>
               <a:spcBef>
                 <a:spcPts val="283"/>
               </a:spcBef>
@@ -6145,7 +6192,10 @@
             </a:lvl7pPr>
           </a:lstStyle>
           <a:p>
-            <a:pPr indent="-324000" algn="l">
+            <a:pPr marL="432000" indent="-324000" algn="l">
+              <a:lnSpc>
+                <a:spcPct val="100000"/>
+              </a:lnSpc>
               <a:spcBef>
                 <a:spcPts val="1417"/>
               </a:spcBef>
@@ -6178,6 +6228,9 @@
           </a:p>
           <a:p>
             <a:pPr marL="864000" lvl="1" indent="-324000" algn="l">
+              <a:lnSpc>
+                <a:spcPct val="100000"/>
+              </a:lnSpc>
               <a:spcBef>
                 <a:spcPts val="1134"/>
               </a:spcBef>
@@ -6210,6 +6263,9 @@
           </a:p>
           <a:p>
             <a:pPr marL="1296000" lvl="2" indent="-288000" algn="l">
+              <a:lnSpc>
+                <a:spcPct val="100000"/>
+              </a:lnSpc>
               <a:spcBef>
                 <a:spcPts val="850"/>
               </a:spcBef>
@@ -6242,6 +6298,9 @@
           </a:p>
           <a:p>
             <a:pPr marL="1728000" lvl="3" indent="-216000" algn="l">
+              <a:lnSpc>
+                <a:spcPct val="100000"/>
+              </a:lnSpc>
               <a:spcBef>
                 <a:spcPts val="567"/>
               </a:spcBef>
@@ -6274,6 +6333,9 @@
           </a:p>
           <a:p>
             <a:pPr marL="2160000" lvl="4" indent="-216000" algn="l">
+              <a:lnSpc>
+                <a:spcPct val="100000"/>
+              </a:lnSpc>
               <a:spcBef>
                 <a:spcPts val="283"/>
               </a:spcBef>
@@ -6306,6 +6368,9 @@
           </a:p>
           <a:p>
             <a:pPr marL="2592000" lvl="5" indent="-216000" algn="l">
+              <a:lnSpc>
+                <a:spcPct val="100000"/>
+              </a:lnSpc>
               <a:spcBef>
                 <a:spcPts val="283"/>
               </a:spcBef>
@@ -6338,6 +6403,9 @@
           </a:p>
           <a:p>
             <a:pPr marL="3024000" lvl="6" indent="-216000" algn="l">
+              <a:lnSpc>
+                <a:spcPct val="100000"/>
+              </a:lnSpc>
               <a:spcBef>
                 <a:spcPts val="283"/>
               </a:spcBef>
@@ -6441,7 +6509,7 @@
         <p:spPr>
           <a:xfrm>
             <a:off x="457200" y="531360"/>
-            <a:ext cx="8228880" cy="205920"/>
+            <a:ext cx="8228520" cy="205920"/>
           </a:xfrm>
           <a:prstGeom prst="rect">
             <a:avLst/>
@@ -6457,6 +6525,9 @@
           </a:bodyPr>
           <a:lstStyle>
             <a:lvl1pPr indent="0" algn="l">
+              <a:lnSpc>
+                <a:spcPct val="100000"/>
+              </a:lnSpc>
               <a:buNone/>
               <a:tabLst>
                 <a:tab pos="0" algn="l"/>
@@ -6473,6 +6544,9 @@
           </a:lstStyle>
           <a:p>
             <a:pPr indent="0" algn="l">
+              <a:lnSpc>
+                <a:spcPct val="100000"/>
+              </a:lnSpc>
               <a:buNone/>
               <a:tabLst>
                 <a:tab pos="0" algn="l"/>
@@ -6513,7 +6587,7 @@
         <p:spPr>
           <a:xfrm>
             <a:off x="457200" y="1203480"/>
-            <a:ext cx="8229240" cy="2982960"/>
+            <a:ext cx="8228880" cy="2982600"/>
           </a:xfrm>
           <a:prstGeom prst="rect">
             <a:avLst/>
@@ -6529,6 +6603,9 @@
           </a:bodyPr>
           <a:lstStyle>
             <a:lvl1pPr algn="l">
+              <a:lnSpc>
+                <a:spcPct val="100000"/>
+              </a:lnSpc>
               <a:spcBef>
                 <a:spcPts val="1060"/>
               </a:spcBef>
@@ -6548,6 +6625,9 @@
               </a:defRPr>
             </a:lvl1pPr>
             <a:lvl2pPr lvl="1" algn="l">
+              <a:lnSpc>
+                <a:spcPct val="100000"/>
+              </a:lnSpc>
               <a:spcBef>
                 <a:spcPts val="848"/>
               </a:spcBef>
@@ -6567,6 +6647,9 @@
               </a:defRPr>
             </a:lvl2pPr>
             <a:lvl3pPr lvl="2" algn="l">
+              <a:lnSpc>
+                <a:spcPct val="100000"/>
+              </a:lnSpc>
               <a:spcBef>
                 <a:spcPts val="635"/>
               </a:spcBef>
@@ -6586,6 +6669,9 @@
               </a:defRPr>
             </a:lvl3pPr>
             <a:lvl4pPr lvl="3" algn="l">
+              <a:lnSpc>
+                <a:spcPct val="100000"/>
+              </a:lnSpc>
               <a:spcBef>
                 <a:spcPts val="422"/>
               </a:spcBef>
@@ -6605,6 +6691,9 @@
               </a:defRPr>
             </a:lvl4pPr>
             <a:lvl5pPr lvl="4" algn="l">
+              <a:lnSpc>
+                <a:spcPct val="100000"/>
+              </a:lnSpc>
               <a:spcBef>
                 <a:spcPts val="210"/>
               </a:spcBef>
@@ -6624,6 +6713,9 @@
               </a:defRPr>
             </a:lvl5pPr>
             <a:lvl6pPr lvl="5" algn="l">
+              <a:lnSpc>
+                <a:spcPct val="100000"/>
+              </a:lnSpc>
               <a:spcBef>
                 <a:spcPts val="210"/>
               </a:spcBef>
@@ -6643,6 +6735,9 @@
               </a:defRPr>
             </a:lvl6pPr>
             <a:lvl7pPr lvl="6" algn="l">
+              <a:lnSpc>
+                <a:spcPct val="100000"/>
+              </a:lnSpc>
               <a:spcBef>
                 <a:spcPts val="210"/>
               </a:spcBef>
@@ -6663,7 +6758,10 @@
             </a:lvl7pPr>
           </a:lstStyle>
           <a:p>
-            <a:pPr indent="-324000" algn="l">
+            <a:pPr marL="432000" indent="-324000" algn="l">
+              <a:lnSpc>
+                <a:spcPct val="100000"/>
+              </a:lnSpc>
               <a:spcBef>
                 <a:spcPts val="1060"/>
               </a:spcBef>
@@ -6696,6 +6794,9 @@
           </a:p>
           <a:p>
             <a:pPr marL="864000" lvl="1" indent="-324000" algn="l">
+              <a:lnSpc>
+                <a:spcPct val="100000"/>
+              </a:lnSpc>
               <a:spcBef>
                 <a:spcPts val="848"/>
               </a:spcBef>
@@ -6728,6 +6829,9 @@
           </a:p>
           <a:p>
             <a:pPr marL="1296000" lvl="2" indent="-288000" algn="l">
+              <a:lnSpc>
+                <a:spcPct val="100000"/>
+              </a:lnSpc>
               <a:spcBef>
                 <a:spcPts val="635"/>
               </a:spcBef>
@@ -6760,6 +6864,9 @@
           </a:p>
           <a:p>
             <a:pPr marL="1728000" lvl="3" indent="-216000" algn="l">
+              <a:lnSpc>
+                <a:spcPct val="100000"/>
+              </a:lnSpc>
               <a:spcBef>
                 <a:spcPts val="422"/>
               </a:spcBef>
@@ -6792,6 +6899,9 @@
           </a:p>
           <a:p>
             <a:pPr marL="2160000" lvl="4" indent="-216000" algn="l">
+              <a:lnSpc>
+                <a:spcPct val="100000"/>
+              </a:lnSpc>
               <a:spcBef>
                 <a:spcPts val="210"/>
               </a:spcBef>
@@ -6824,6 +6934,9 @@
           </a:p>
           <a:p>
             <a:pPr marL="2592000" lvl="5" indent="-216000" algn="l">
+              <a:lnSpc>
+                <a:spcPct val="100000"/>
+              </a:lnSpc>
               <a:spcBef>
                 <a:spcPts val="210"/>
               </a:spcBef>
@@ -6856,6 +6969,9 @@
           </a:p>
           <a:p>
             <a:pPr marL="3024000" lvl="6" indent="-216000" algn="l">
+              <a:lnSpc>
+                <a:spcPct val="100000"/>
+              </a:lnSpc>
               <a:spcBef>
                 <a:spcPts val="210"/>
               </a:spcBef>
@@ -6979,13 +7095,13 @@
         </p:nvPicPr>
         <p:blipFill>
           <a:blip r:embed="rId1"/>
-          <a:srcRect l="41991" t="0" r="9372" b="0"/>
+          <a:srcRect l="41987" t="0" r="9372" b="0"/>
           <a:stretch/>
         </p:blipFill>
         <p:spPr>
           <a:xfrm>
             <a:off x="4697640" y="0"/>
-            <a:ext cx="4443480" cy="5142960"/>
+            <a:ext cx="4443120" cy="5142600"/>
           </a:xfrm>
           <a:prstGeom prst="rect">
             <a:avLst/>
@@ -7005,7 +7121,7 @@
         <p:spPr>
           <a:xfrm>
             <a:off x="4526280" y="0"/>
-            <a:ext cx="170640" cy="5143320"/>
+            <a:ext cx="170280" cy="5142960"/>
           </a:xfrm>
           <a:prstGeom prst="rect">
             <a:avLst/>
@@ -7051,7 +7167,7 @@
         <p:spPr>
           <a:xfrm>
             <a:off x="493920" y="493560"/>
-            <a:ext cx="1576800" cy="171000"/>
+            <a:ext cx="1576440" cy="170640"/>
           </a:xfrm>
           <a:prstGeom prst="rect">
             <a:avLst/>
@@ -7112,7 +7228,7 @@
         <p:spPr>
           <a:xfrm>
             <a:off x="479880" y="925560"/>
-            <a:ext cx="3805560" cy="993960"/>
+            <a:ext cx="3805200" cy="993600"/>
           </a:xfrm>
           <a:prstGeom prst="rect">
             <a:avLst/>
@@ -7203,7 +7319,7 @@
         <p:spPr>
           <a:xfrm>
             <a:off x="493920" y="2160000"/>
-            <a:ext cx="3771360" cy="239400"/>
+            <a:ext cx="3771000" cy="239040"/>
           </a:xfrm>
           <a:prstGeom prst="rect">
             <a:avLst/>
@@ -7244,7 +7360,7 @@
         <p:spPr>
           <a:xfrm>
             <a:off x="493920" y="2880360"/>
-            <a:ext cx="3531240" cy="650880"/>
+            <a:ext cx="3530880" cy="650520"/>
           </a:xfrm>
           <a:prstGeom prst="roundRect">
             <a:avLst>
@@ -7292,7 +7408,7 @@
         <p:spPr>
           <a:xfrm>
             <a:off x="644760" y="3017520"/>
-            <a:ext cx="3229560" cy="410760"/>
+            <a:ext cx="3229200" cy="410400"/>
           </a:xfrm>
           <a:prstGeom prst="rect">
             <a:avLst/>
@@ -7353,7 +7469,7 @@
         <p:spPr>
           <a:xfrm>
             <a:off x="377280" y="4903560"/>
-            <a:ext cx="3976920" cy="136440"/>
+            <a:ext cx="3976560" cy="136080"/>
           </a:xfrm>
           <a:prstGeom prst="rect">
             <a:avLst/>
@@ -7414,7 +7530,7 @@
         <p:spPr>
           <a:xfrm>
             <a:off x="8332560" y="4883040"/>
-            <a:ext cx="376560" cy="136440"/>
+            <a:ext cx="376200" cy="136080"/>
           </a:xfrm>
           <a:prstGeom prst="rect">
             <a:avLst/>
@@ -7512,7 +7628,7 @@
         <p:spPr>
           <a:xfrm>
             <a:off x="0" y="0"/>
-            <a:ext cx="9143280" cy="776520"/>
+            <a:ext cx="9142920" cy="776160"/>
           </a:xfrm>
           <a:prstGeom prst="rect">
             <a:avLst/>
@@ -7558,7 +7674,7 @@
         <p:spPr>
           <a:xfrm>
             <a:off x="0" y="777240"/>
-            <a:ext cx="9143280" cy="63360"/>
+            <a:ext cx="9142920" cy="63000"/>
           </a:xfrm>
           <a:prstGeom prst="rect">
             <a:avLst/>
@@ -7604,7 +7720,7 @@
         <p:spPr>
           <a:xfrm>
             <a:off x="320040" y="0"/>
-            <a:ext cx="8503200" cy="776520"/>
+            <a:ext cx="8502840" cy="776160"/>
           </a:xfrm>
           <a:prstGeom prst="rect">
             <a:avLst/>
@@ -7665,7 +7781,7 @@
         <p:spPr>
           <a:xfrm>
             <a:off x="365760" y="2331720"/>
-            <a:ext cx="8411760" cy="163800"/>
+            <a:ext cx="8411400" cy="163440"/>
           </a:xfrm>
           <a:prstGeom prst="rect">
             <a:avLst/>
@@ -7711,7 +7827,7 @@
         <p:spPr>
           <a:xfrm>
             <a:off x="777240" y="2249280"/>
-            <a:ext cx="255240" cy="255240"/>
+            <a:ext cx="254880" cy="254880"/>
           </a:xfrm>
           <a:prstGeom prst="ellipse">
             <a:avLst/>
@@ -7757,7 +7873,7 @@
         <p:spPr>
           <a:xfrm>
             <a:off x="365760" y="960120"/>
-            <a:ext cx="1188000" cy="776520"/>
+            <a:ext cx="1187640" cy="776160"/>
           </a:xfrm>
           <a:prstGeom prst="rect">
             <a:avLst/>
@@ -7892,7 +8008,7 @@
         <p:spPr>
           <a:xfrm>
             <a:off x="365760" y="2541960"/>
-            <a:ext cx="1188000" cy="730800"/>
+            <a:ext cx="1187640" cy="730440"/>
           </a:xfrm>
           <a:prstGeom prst="rect">
             <a:avLst/>
@@ -7983,7 +8099,7 @@
         <p:spPr>
           <a:xfrm>
             <a:off x="2057400" y="2249280"/>
-            <a:ext cx="255240" cy="255240"/>
+            <a:ext cx="254880" cy="254880"/>
           </a:xfrm>
           <a:prstGeom prst="ellipse">
             <a:avLst/>
@@ -8029,7 +8145,7 @@
         <p:spPr>
           <a:xfrm>
             <a:off x="1645920" y="1051560"/>
-            <a:ext cx="1188000" cy="730800"/>
+            <a:ext cx="1187640" cy="730440"/>
           </a:xfrm>
           <a:prstGeom prst="rect">
             <a:avLst/>
@@ -8164,7 +8280,7 @@
         <p:spPr>
           <a:xfrm>
             <a:off x="1645920" y="2578680"/>
-            <a:ext cx="1188000" cy="776520"/>
+            <a:ext cx="1187640" cy="776160"/>
           </a:xfrm>
           <a:prstGeom prst="rect">
             <a:avLst/>
@@ -8255,7 +8371,7 @@
         <p:spPr>
           <a:xfrm>
             <a:off x="3383280" y="2249280"/>
-            <a:ext cx="255240" cy="255240"/>
+            <a:ext cx="254880" cy="254880"/>
           </a:xfrm>
           <a:prstGeom prst="ellipse">
             <a:avLst/>
@@ -8301,7 +8417,7 @@
         <p:spPr>
           <a:xfrm>
             <a:off x="2971800" y="960120"/>
-            <a:ext cx="1188000" cy="776520"/>
+            <a:ext cx="1187640" cy="776160"/>
           </a:xfrm>
           <a:prstGeom prst="rect">
             <a:avLst/>
@@ -8436,7 +8552,7 @@
         <p:spPr>
           <a:xfrm>
             <a:off x="2971800" y="2541960"/>
-            <a:ext cx="1188000" cy="730800"/>
+            <a:ext cx="1187640" cy="730440"/>
           </a:xfrm>
           <a:prstGeom prst="rect">
             <a:avLst/>
@@ -8527,7 +8643,7 @@
         <p:spPr>
           <a:xfrm>
             <a:off x="4663440" y="2249280"/>
-            <a:ext cx="255240" cy="255240"/>
+            <a:ext cx="254880" cy="254880"/>
           </a:xfrm>
           <a:prstGeom prst="ellipse">
             <a:avLst/>
@@ -8573,7 +8689,7 @@
         <p:spPr>
           <a:xfrm>
             <a:off x="4251960" y="1051560"/>
-            <a:ext cx="1188000" cy="730800"/>
+            <a:ext cx="1187640" cy="730440"/>
           </a:xfrm>
           <a:prstGeom prst="rect">
             <a:avLst/>
@@ -8708,7 +8824,7 @@
         <p:spPr>
           <a:xfrm>
             <a:off x="4251960" y="2578680"/>
-            <a:ext cx="1188000" cy="776520"/>
+            <a:ext cx="1187640" cy="776160"/>
           </a:xfrm>
           <a:prstGeom prst="rect">
             <a:avLst/>
@@ -8799,7 +8915,7 @@
         <p:spPr>
           <a:xfrm>
             <a:off x="5943600" y="2249280"/>
-            <a:ext cx="255240" cy="255240"/>
+            <a:ext cx="254880" cy="254880"/>
           </a:xfrm>
           <a:prstGeom prst="ellipse">
             <a:avLst/>
@@ -8845,7 +8961,7 @@
         <p:spPr>
           <a:xfrm>
             <a:off x="5532120" y="960120"/>
-            <a:ext cx="1188000" cy="776520"/>
+            <a:ext cx="1187640" cy="776160"/>
           </a:xfrm>
           <a:prstGeom prst="rect">
             <a:avLst/>
@@ -8980,7 +9096,7 @@
         <p:spPr>
           <a:xfrm>
             <a:off x="5532120" y="2541960"/>
-            <a:ext cx="1188000" cy="730800"/>
+            <a:ext cx="1187640" cy="730440"/>
           </a:xfrm>
           <a:prstGeom prst="rect">
             <a:avLst/>
@@ -9071,7 +9187,7 @@
         <p:spPr>
           <a:xfrm>
             <a:off x="7223760" y="2249280"/>
-            <a:ext cx="255240" cy="255240"/>
+            <a:ext cx="254880" cy="254880"/>
           </a:xfrm>
           <a:prstGeom prst="ellipse">
             <a:avLst/>
@@ -9117,7 +9233,7 @@
         <p:spPr>
           <a:xfrm>
             <a:off x="6812280" y="1051560"/>
-            <a:ext cx="1188000" cy="730800"/>
+            <a:ext cx="1187640" cy="730440"/>
           </a:xfrm>
           <a:prstGeom prst="rect">
             <a:avLst/>
@@ -9252,7 +9368,7 @@
         <p:spPr>
           <a:xfrm>
             <a:off x="6812280" y="2578680"/>
-            <a:ext cx="1188000" cy="776520"/>
+            <a:ext cx="1187640" cy="776160"/>
           </a:xfrm>
           <a:prstGeom prst="rect">
             <a:avLst/>
@@ -9343,7 +9459,7 @@
         <p:spPr>
           <a:xfrm>
             <a:off x="8412480" y="2249280"/>
-            <a:ext cx="255240" cy="255240"/>
+            <a:ext cx="254880" cy="254880"/>
           </a:xfrm>
           <a:prstGeom prst="ellipse">
             <a:avLst/>
@@ -9389,7 +9505,7 @@
         <p:spPr>
           <a:xfrm>
             <a:off x="8001000" y="960120"/>
-            <a:ext cx="1188000" cy="776520"/>
+            <a:ext cx="1187640" cy="776160"/>
           </a:xfrm>
           <a:prstGeom prst="rect">
             <a:avLst/>
@@ -9524,7 +9640,7 @@
         <p:spPr>
           <a:xfrm>
             <a:off x="8001000" y="2541960"/>
-            <a:ext cx="1188000" cy="730800"/>
+            <a:ext cx="1187640" cy="730440"/>
           </a:xfrm>
           <a:prstGeom prst="rect">
             <a:avLst/>
@@ -9615,7 +9731,7 @@
         <p:spPr>
           <a:xfrm>
             <a:off x="365760" y="3657600"/>
-            <a:ext cx="8411760" cy="1233720"/>
+            <a:ext cx="8411400" cy="1233360"/>
           </a:xfrm>
           <a:prstGeom prst="rect">
             <a:avLst/>
@@ -9661,7 +9777,7 @@
         <p:spPr>
           <a:xfrm>
             <a:off x="365760" y="3657600"/>
-            <a:ext cx="8411760" cy="346680"/>
+            <a:ext cx="8411400" cy="346320"/>
           </a:xfrm>
           <a:prstGeom prst="rect">
             <a:avLst/>
@@ -9707,7 +9823,7 @@
         <p:spPr>
           <a:xfrm>
             <a:off x="365760" y="3657600"/>
-            <a:ext cx="8411760" cy="346680"/>
+            <a:ext cx="8411400" cy="346320"/>
           </a:xfrm>
           <a:prstGeom prst="rect">
             <a:avLst/>
@@ -9768,7 +9884,7 @@
         <p:spPr>
           <a:xfrm>
             <a:off x="457200" y="4041720"/>
-            <a:ext cx="8228880" cy="730800"/>
+            <a:ext cx="8228520" cy="730440"/>
           </a:xfrm>
           <a:prstGeom prst="rect">
             <a:avLst/>
@@ -9866,7 +9982,7 @@
         <p:spPr>
           <a:xfrm>
             <a:off x="0" y="0"/>
-            <a:ext cx="9143280" cy="776520"/>
+            <a:ext cx="9142920" cy="776160"/>
           </a:xfrm>
           <a:prstGeom prst="rect">
             <a:avLst/>
@@ -9912,7 +10028,7 @@
         <p:spPr>
           <a:xfrm>
             <a:off x="0" y="777240"/>
-            <a:ext cx="9143280" cy="63360"/>
+            <a:ext cx="9142920" cy="63000"/>
           </a:xfrm>
           <a:prstGeom prst="rect">
             <a:avLst/>
@@ -9958,7 +10074,7 @@
         <p:spPr>
           <a:xfrm>
             <a:off x="320040" y="0"/>
-            <a:ext cx="8503200" cy="776520"/>
+            <a:ext cx="8502840" cy="776160"/>
           </a:xfrm>
           <a:prstGeom prst="rect">
             <a:avLst/>
@@ -10019,7 +10135,7 @@
         <p:spPr>
           <a:xfrm>
             <a:off x="365760" y="960120"/>
-            <a:ext cx="8411760" cy="3976920"/>
+            <a:ext cx="8411400" cy="3976560"/>
           </a:xfrm>
           <a:prstGeom prst="rect">
             <a:avLst/>
@@ -10577,7 +10693,7 @@
         <p:spPr>
           <a:xfrm>
             <a:off x="0" y="0"/>
-            <a:ext cx="9143280" cy="776520"/>
+            <a:ext cx="9142920" cy="776160"/>
           </a:xfrm>
           <a:prstGeom prst="rect">
             <a:avLst/>
@@ -10623,7 +10739,7 @@
         <p:spPr>
           <a:xfrm>
             <a:off x="0" y="777240"/>
-            <a:ext cx="9143280" cy="63360"/>
+            <a:ext cx="9142920" cy="63000"/>
           </a:xfrm>
           <a:prstGeom prst="rect">
             <a:avLst/>
@@ -10669,7 +10785,7 @@
         <p:spPr>
           <a:xfrm>
             <a:off x="320040" y="0"/>
-            <a:ext cx="8503200" cy="776520"/>
+            <a:ext cx="8502840" cy="776160"/>
           </a:xfrm>
           <a:prstGeom prst="rect">
             <a:avLst/>
@@ -10730,7 +10846,7 @@
         <p:spPr>
           <a:xfrm>
             <a:off x="320040" y="1005840"/>
-            <a:ext cx="3931200" cy="3839760"/>
+            <a:ext cx="3930840" cy="3839400"/>
           </a:xfrm>
           <a:prstGeom prst="rect">
             <a:avLst/>
@@ -10783,7 +10899,7 @@
         <p:spPr>
           <a:xfrm>
             <a:off x="320040" y="1005840"/>
-            <a:ext cx="3931200" cy="410760"/>
+            <a:ext cx="3930840" cy="410400"/>
           </a:xfrm>
           <a:prstGeom prst="rect">
             <a:avLst/>
@@ -10829,7 +10945,7 @@
         <p:spPr>
           <a:xfrm>
             <a:off x="320040" y="1005840"/>
-            <a:ext cx="3931200" cy="410760"/>
+            <a:ext cx="3930840" cy="410400"/>
           </a:xfrm>
           <a:prstGeom prst="rect">
             <a:avLst/>
@@ -10890,7 +11006,7 @@
         <p:spPr>
           <a:xfrm>
             <a:off x="457200" y="1508760"/>
-            <a:ext cx="3656880" cy="3199680"/>
+            <a:ext cx="3656520" cy="3199320"/>
           </a:xfrm>
           <a:prstGeom prst="rect">
             <a:avLst/>
@@ -11096,7 +11212,7 @@
         <p:spPr>
           <a:xfrm>
             <a:off x="4892040" y="1005840"/>
-            <a:ext cx="3931200" cy="3839760"/>
+            <a:ext cx="3930840" cy="3839400"/>
           </a:xfrm>
           <a:prstGeom prst="rect">
             <a:avLst/>
@@ -11149,7 +11265,7 @@
         <p:spPr>
           <a:xfrm>
             <a:off x="4892040" y="1005840"/>
-            <a:ext cx="3931200" cy="410760"/>
+            <a:ext cx="3930840" cy="410400"/>
           </a:xfrm>
           <a:prstGeom prst="rect">
             <a:avLst/>
@@ -11195,7 +11311,7 @@
         <p:spPr>
           <a:xfrm>
             <a:off x="4892040" y="1005840"/>
-            <a:ext cx="3931200" cy="410760"/>
+            <a:ext cx="3930840" cy="410400"/>
           </a:xfrm>
           <a:prstGeom prst="rect">
             <a:avLst/>
@@ -11256,7 +11372,7 @@
         <p:spPr>
           <a:xfrm>
             <a:off x="5029200" y="1508760"/>
-            <a:ext cx="3656880" cy="3199680"/>
+            <a:ext cx="3656520" cy="3199320"/>
           </a:xfrm>
           <a:prstGeom prst="rect">
             <a:avLst/>
@@ -11499,7 +11615,7 @@
         <p:spPr>
           <a:xfrm>
             <a:off x="0" y="0"/>
-            <a:ext cx="9143280" cy="776520"/>
+            <a:ext cx="9142920" cy="776160"/>
           </a:xfrm>
           <a:prstGeom prst="rect">
             <a:avLst/>
@@ -11545,7 +11661,7 @@
         <p:spPr>
           <a:xfrm>
             <a:off x="0" y="777240"/>
-            <a:ext cx="9143280" cy="63360"/>
+            <a:ext cx="9142920" cy="63000"/>
           </a:xfrm>
           <a:prstGeom prst="rect">
             <a:avLst/>
@@ -11591,7 +11707,7 @@
         <p:spPr>
           <a:xfrm>
             <a:off x="320040" y="0"/>
-            <a:ext cx="8503200" cy="776520"/>
+            <a:ext cx="8502840" cy="776160"/>
           </a:xfrm>
           <a:prstGeom prst="rect">
             <a:avLst/>
@@ -11652,7 +11768,7 @@
         <p:spPr>
           <a:xfrm>
             <a:off x="365760" y="960120"/>
-            <a:ext cx="8411760" cy="3976920"/>
+            <a:ext cx="8411400" cy="3976560"/>
           </a:xfrm>
           <a:prstGeom prst="rect">
             <a:avLst/>
@@ -12175,7 +12291,7 @@
         <p:spPr>
           <a:xfrm>
             <a:off x="0" y="0"/>
-            <a:ext cx="9143280" cy="776520"/>
+            <a:ext cx="9142920" cy="776160"/>
           </a:xfrm>
           <a:prstGeom prst="rect">
             <a:avLst/>
@@ -12221,7 +12337,7 @@
         <p:spPr>
           <a:xfrm>
             <a:off x="0" y="777240"/>
-            <a:ext cx="9143280" cy="63360"/>
+            <a:ext cx="9142920" cy="63000"/>
           </a:xfrm>
           <a:prstGeom prst="rect">
             <a:avLst/>
@@ -12267,7 +12383,7 @@
         <p:spPr>
           <a:xfrm>
             <a:off x="320040" y="0"/>
-            <a:ext cx="8503200" cy="776520"/>
+            <a:ext cx="8502840" cy="776160"/>
           </a:xfrm>
           <a:prstGeom prst="rect">
             <a:avLst/>
@@ -12328,7 +12444,7 @@
         <p:spPr>
           <a:xfrm>
             <a:off x="365760" y="960120"/>
-            <a:ext cx="8411760" cy="3976920"/>
+            <a:ext cx="8411400" cy="3976560"/>
           </a:xfrm>
           <a:prstGeom prst="rect">
             <a:avLst/>
@@ -12886,7 +13002,7 @@
         <p:spPr>
           <a:xfrm>
             <a:off x="0" y="0"/>
-            <a:ext cx="9143280" cy="776520"/>
+            <a:ext cx="9142920" cy="776160"/>
           </a:xfrm>
           <a:prstGeom prst="rect">
             <a:avLst/>
@@ -12932,7 +13048,7 @@
         <p:spPr>
           <a:xfrm>
             <a:off x="0" y="777240"/>
-            <a:ext cx="9143280" cy="63360"/>
+            <a:ext cx="9142920" cy="63000"/>
           </a:xfrm>
           <a:prstGeom prst="rect">
             <a:avLst/>
@@ -12978,7 +13094,7 @@
         <p:spPr>
           <a:xfrm>
             <a:off x="320040" y="0"/>
-            <a:ext cx="8503200" cy="776520"/>
+            <a:ext cx="8502840" cy="776160"/>
           </a:xfrm>
           <a:prstGeom prst="rect">
             <a:avLst/>
@@ -13039,7 +13155,7 @@
         <p:spPr>
           <a:xfrm>
             <a:off x="320040" y="1005840"/>
-            <a:ext cx="3931200" cy="3839760"/>
+            <a:ext cx="3930840" cy="3839400"/>
           </a:xfrm>
           <a:prstGeom prst="rect">
             <a:avLst/>
@@ -13092,7 +13208,7 @@
         <p:spPr>
           <a:xfrm>
             <a:off x="320040" y="1005840"/>
-            <a:ext cx="3931200" cy="410760"/>
+            <a:ext cx="3930840" cy="410400"/>
           </a:xfrm>
           <a:prstGeom prst="rect">
             <a:avLst/>
@@ -13138,7 +13254,7 @@
         <p:spPr>
           <a:xfrm>
             <a:off x="320040" y="1005840"/>
-            <a:ext cx="3931200" cy="410760"/>
+            <a:ext cx="3930840" cy="410400"/>
           </a:xfrm>
           <a:prstGeom prst="rect">
             <a:avLst/>
@@ -13199,7 +13315,7 @@
         <p:spPr>
           <a:xfrm>
             <a:off x="457200" y="1508760"/>
-            <a:ext cx="3656880" cy="3199680"/>
+            <a:ext cx="3656520" cy="3199320"/>
           </a:xfrm>
           <a:prstGeom prst="rect">
             <a:avLst/>
@@ -13440,7 +13556,7 @@
         <p:spPr>
           <a:xfrm>
             <a:off x="4892040" y="1005840"/>
-            <a:ext cx="3931200" cy="3839760"/>
+            <a:ext cx="3930840" cy="3839400"/>
           </a:xfrm>
           <a:prstGeom prst="rect">
             <a:avLst/>
@@ -13493,7 +13609,7 @@
         <p:spPr>
           <a:xfrm>
             <a:off x="4892040" y="1005840"/>
-            <a:ext cx="3931200" cy="410760"/>
+            <a:ext cx="3930840" cy="410400"/>
           </a:xfrm>
           <a:prstGeom prst="rect">
             <a:avLst/>
@@ -13539,7 +13655,7 @@
         <p:spPr>
           <a:xfrm>
             <a:off x="4892040" y="1005840"/>
-            <a:ext cx="3931200" cy="410760"/>
+            <a:ext cx="3930840" cy="410400"/>
           </a:xfrm>
           <a:prstGeom prst="rect">
             <a:avLst/>
@@ -13600,7 +13716,7 @@
         <p:spPr>
           <a:xfrm>
             <a:off x="5029200" y="1508760"/>
-            <a:ext cx="3656880" cy="3199680"/>
+            <a:ext cx="3656520" cy="3199320"/>
           </a:xfrm>
           <a:prstGeom prst="rect">
             <a:avLst/>
@@ -13672,6 +13788,31 @@
             <a:r>
               <a:rPr lang="en-US" sz="1300" b="0" u="none" strike="noStrike">
                 <a:solidFill>
+                  <a:srgbClr val="00A933"/>
+                </a:solidFill>
+                <a:effectLst/>
+                <a:uFillTx/>
+                <a:latin typeface="Calibri"/>
+                <a:ea typeface="Calibri"/>
+                <a:hlinkClick r:id="rId1"/>
+              </a:rPr>
+              <a:t>Mass surveillance</a:t>
+            </a:r>
+            <a:r>
+              <a:rPr lang="en-US" sz="1300" b="0" u="none" strike="noStrike">
+                <a:solidFill>
+                  <a:srgbClr val="00A933"/>
+                </a:solidFill>
+                <a:effectLst/>
+                <a:uFillTx/>
+                <a:latin typeface="Calibri"/>
+                <a:ea typeface="Calibri"/>
+              </a:rPr>
+              <a:t>:</a:t>
+            </a:r>
+            <a:r>
+              <a:rPr lang="en-US" sz="1300" b="0" u="none" strike="noStrike">
+                <a:solidFill>
                   <a:srgbClr val="0F2B5B"/>
                 </a:solidFill>
                 <a:effectLst/>
@@ -13679,7 +13820,7 @@
                 <a:latin typeface="Calibri"/>
                 <a:ea typeface="Calibri"/>
               </a:rPr>
-              <a:t>Mass surveillance: speech/vision AI enables real-time monitoring at scale</a:t>
+              <a:t> speech/vision AI enables real-time monitoring at scale</a:t>
             </a:r>
             <a:endParaRPr lang="en-US" sz="1300" b="0" u="none" strike="noStrike">
               <a:solidFill>
@@ -13851,7 +13992,7 @@
     <p:bg>
       <p:bgPr>
         <a:solidFill>
-          <a:srgbClr val="0F2B5B"/>
+          <a:srgbClr val="0F3679"/>
         </a:solidFill>
       </p:bgPr>
     </p:bg>
@@ -13878,7 +14019,7 @@
         <p:spPr>
           <a:xfrm>
             <a:off x="0" y="0"/>
-            <a:ext cx="163800" cy="5142960"/>
+            <a:ext cx="163440" cy="5142600"/>
           </a:xfrm>
           <a:prstGeom prst="rect">
             <a:avLst/>
@@ -13900,7 +14041,7 @@
           <a:fontRef idx="minor"/>
         </p:style>
         <p:txBody>
-          <a:bodyPr lIns="82080" tIns="45000" rIns="82080" bIns="45000" anchor="t">
+          <a:bodyPr lIns="81720" tIns="45000" rIns="81720" bIns="45000" anchor="t">
             <a:noAutofit/>
           </a:bodyPr>
           <a:p>
@@ -13924,7 +14065,7 @@
         <p:spPr>
           <a:xfrm>
             <a:off x="457200" y="228600"/>
-            <a:ext cx="8228880" cy="685080"/>
+            <a:ext cx="8228520" cy="684720"/>
           </a:xfrm>
           <a:prstGeom prst="rect">
             <a:avLst/>
@@ -13985,7 +14126,7 @@
         <p:spPr>
           <a:xfrm>
             <a:off x="457200" y="1005840"/>
-            <a:ext cx="8320320" cy="3931200"/>
+            <a:ext cx="8319960" cy="3930840"/>
           </a:xfrm>
           <a:prstGeom prst="rect">
             <a:avLst/>
@@ -14020,7 +14161,7 @@
               <a:buChar char=""/>
             </a:pPr>
             <a:r>
-              <a:rPr lang="en-US" sz="1300" b="0" u="none" strike="noStrike">
+              <a:rPr lang="en-US" sz="1500" b="1" u="none" strike="noStrike">
                 <a:solidFill>
                   <a:srgbClr val="FFFFFF"/>
                 </a:solidFill>
@@ -14029,9 +14170,21 @@
                 <a:latin typeface="Calibri"/>
                 <a:ea typeface="Calibri"/>
               </a:rPr>
-              <a:t>AI's goal: build agents that act rationally — maximizing expected performance given an objective.</a:t>
-            </a:r>
-            <a:endParaRPr lang="en-US" sz="1300" b="0" u="none" strike="noStrike">
+              <a:t>AI's goal:</a:t>
+            </a:r>
+            <a:r>
+              <a:rPr lang="en-US" sz="1500" b="0" u="none" strike="noStrike">
+                <a:solidFill>
+                  <a:srgbClr val="FFFFFF"/>
+                </a:solidFill>
+                <a:effectLst/>
+                <a:uFillTx/>
+                <a:latin typeface="Calibri"/>
+                <a:ea typeface="Calibri"/>
+              </a:rPr>
+              <a:t> build agents that act rationally — maximizing expected performance given an objective.</a:t>
+            </a:r>
+            <a:endParaRPr lang="en-US" sz="1500" b="0" u="none" strike="noStrike">
               <a:solidFill>
                 <a:srgbClr val="FFFFFF"/>
               </a:solidFill>
@@ -14055,7 +14208,7 @@
               <a:buChar char=""/>
             </a:pPr>
             <a:r>
-              <a:rPr lang="en-US" sz="1300" b="0" u="none" strike="noStrike">
+              <a:rPr lang="en-US" sz="1500" b="1" u="none" strike="noStrike">
                 <a:solidFill>
                   <a:srgbClr val="FFFFFF"/>
                 </a:solidFill>
@@ -14064,9 +14217,21 @@
                 <a:latin typeface="Calibri"/>
                 <a:ea typeface="Calibri"/>
               </a:rPr>
-              <a:t>Four historical approaches: acting/thinking humanly vs. rationally. The rational agent approach dominates.</a:t>
-            </a:r>
-            <a:endParaRPr lang="en-US" sz="1300" b="0" u="none" strike="noStrike">
+              <a:t>Four historical approaches: </a:t>
+            </a:r>
+            <a:r>
+              <a:rPr lang="en-US" sz="1500" b="0" u="none" strike="noStrike">
+                <a:solidFill>
+                  <a:srgbClr val="FFFFFF"/>
+                </a:solidFill>
+                <a:effectLst/>
+                <a:uFillTx/>
+                <a:latin typeface="Calibri"/>
+                <a:ea typeface="Calibri"/>
+              </a:rPr>
+              <a:t>acting/thinking humanly vs. rationally. The rational agent approach dominates.</a:t>
+            </a:r>
+            <a:endParaRPr lang="en-US" sz="1500" b="0" u="none" strike="noStrike">
               <a:solidFill>
                 <a:srgbClr val="FFFFFF"/>
               </a:solidFill>
@@ -14090,7 +14255,7 @@
               <a:buChar char=""/>
             </a:pPr>
             <a:r>
-              <a:rPr lang="en-US" sz="1300" b="0" u="none" strike="noStrike">
+              <a:rPr lang="en-US" sz="1500" b="1" u="none" strike="noStrike">
                 <a:solidFill>
                   <a:srgbClr val="FFFFFF"/>
                 </a:solidFill>
@@ -14099,9 +14264,21 @@
                 <a:latin typeface="Calibri"/>
                 <a:ea typeface="Calibri"/>
               </a:rPr>
-              <a:t>Value alignment: machines pursuing a fixed objective can cause harm; future AI must handle uncertain objectives.</a:t>
-            </a:r>
-            <a:endParaRPr lang="en-US" sz="1300" b="0" u="none" strike="noStrike">
+              <a:t>Value alignment:</a:t>
+            </a:r>
+            <a:r>
+              <a:rPr lang="en-US" sz="1500" b="0" u="none" strike="noStrike">
+                <a:solidFill>
+                  <a:srgbClr val="FFFFFF"/>
+                </a:solidFill>
+                <a:effectLst/>
+                <a:uFillTx/>
+                <a:latin typeface="Calibri"/>
+                <a:ea typeface="Calibri"/>
+              </a:rPr>
+              <a:t> machines pursuing a fixed objective can cause harm; future AI must handle uncertain objectives.</a:t>
+            </a:r>
+            <a:endParaRPr lang="en-US" sz="1500" b="0" u="none" strike="noStrike">
               <a:solidFill>
                 <a:srgbClr val="FFFFFF"/>
               </a:solidFill>
@@ -14125,7 +14302,7 @@
               <a:buChar char=""/>
             </a:pPr>
             <a:r>
-              <a:rPr lang="en-US" sz="1300" b="0" u="none" strike="noStrike">
+              <a:rPr lang="en-US" sz="1500" b="1" u="none" strike="noStrike">
                 <a:solidFill>
                   <a:srgbClr val="FFFFFF"/>
                 </a:solidFill>
@@ -14134,9 +14311,21 @@
                 <a:latin typeface="Calibri"/>
                 <a:ea typeface="Calibri"/>
               </a:rPr>
-              <a:t>Seven founding disciplines: Philosophy, Mathematics, Economics, Neuroscience, Psychology, Linguistics, CS.</a:t>
-            </a:r>
-            <a:endParaRPr lang="en-US" sz="1300" b="0" u="none" strike="noStrike">
+              <a:t>Seven founding disciplines: </a:t>
+            </a:r>
+            <a:r>
+              <a:rPr lang="en-US" sz="1500" b="0" u="none" strike="noStrike">
+                <a:solidFill>
+                  <a:srgbClr val="FFFFFF"/>
+                </a:solidFill>
+                <a:effectLst/>
+                <a:uFillTx/>
+                <a:latin typeface="Calibri"/>
+                <a:ea typeface="Calibri"/>
+              </a:rPr>
+              <a:t>Philosophy, Mathematics, Economics, Neuroscience, Psychology, Linguistics, CS.</a:t>
+            </a:r>
+            <a:endParaRPr lang="en-US" sz="1500" b="0" u="none" strike="noStrike">
               <a:solidFill>
                 <a:srgbClr val="FFFFFF"/>
               </a:solidFill>
@@ -14160,7 +14349,7 @@
               <a:buChar char=""/>
             </a:pPr>
             <a:r>
-              <a:rPr lang="en-US" sz="1300" b="0" u="none" strike="noStrike">
+              <a:rPr lang="en-US" sz="1500" b="1" u="none" strike="noStrike">
                 <a:solidFill>
                   <a:srgbClr val="FFFFFF"/>
                 </a:solidFill>
@@ -14169,9 +14358,21 @@
                 <a:latin typeface="Calibri"/>
                 <a:ea typeface="Calibri"/>
               </a:rPr>
-              <a:t>History follows cycles: enthusiasm → failure → new approach. Deep learning is the latest revolution.</a:t>
-            </a:r>
-            <a:endParaRPr lang="en-US" sz="1300" b="0" u="none" strike="noStrike">
+              <a:t>History follows cycles: </a:t>
+            </a:r>
+            <a:r>
+              <a:rPr lang="en-US" sz="1500" b="0" u="none" strike="noStrike">
+                <a:solidFill>
+                  <a:srgbClr val="FFFFFF"/>
+                </a:solidFill>
+                <a:effectLst/>
+                <a:uFillTx/>
+                <a:latin typeface="Calibri"/>
+                <a:ea typeface="Calibri"/>
+              </a:rPr>
+              <a:t>enthusiasm → failure → new approach. Deep learning is the latest revolution.</a:t>
+            </a:r>
+            <a:endParaRPr lang="en-US" sz="1500" b="0" u="none" strike="noStrike">
               <a:solidFill>
                 <a:srgbClr val="FFFFFF"/>
               </a:solidFill>
@@ -14195,7 +14396,7 @@
               <a:buChar char=""/>
             </a:pPr>
             <a:r>
-              <a:rPr lang="en-US" sz="1300" b="0" u="none" strike="noStrike">
+              <a:rPr lang="en-US" sz="1500" b="1" u="none" strike="noStrike">
                 <a:solidFill>
                   <a:srgbClr val="FFFFFF"/>
                 </a:solidFill>
@@ -14204,9 +14405,21 @@
                 <a:latin typeface="Calibri"/>
                 <a:ea typeface="Calibri"/>
               </a:rPr>
-              <a:t>State of the art: AI now matches or exceeds humans in perception, translation, diagnosis, and complex games.</a:t>
-            </a:r>
-            <a:endParaRPr lang="en-US" sz="1300" b="0" u="none" strike="noStrike">
+              <a:t>State of the art: </a:t>
+            </a:r>
+            <a:r>
+              <a:rPr lang="en-US" sz="1500" b="0" u="none" strike="noStrike">
+                <a:solidFill>
+                  <a:srgbClr val="FFFFFF"/>
+                </a:solidFill>
+                <a:effectLst/>
+                <a:uFillTx/>
+                <a:latin typeface="Calibri"/>
+                <a:ea typeface="Calibri"/>
+              </a:rPr>
+              <a:t>AI now matches or exceeds humans in perception, translation, diagnosis, and complex games.</a:t>
+            </a:r>
+            <a:endParaRPr lang="en-US" sz="1500" b="0" u="none" strike="noStrike">
               <a:solidFill>
                 <a:srgbClr val="FFFFFF"/>
               </a:solidFill>
@@ -14230,6 +14443,30 @@
               <a:buChar char=""/>
             </a:pPr>
             <a:r>
+              <a:rPr lang="en-US" sz="1500" b="1" u="none" strike="noStrike">
+                <a:solidFill>
+                  <a:srgbClr val="FFFFFF"/>
+                </a:solidFill>
+                <a:effectLst/>
+                <a:uFillTx/>
+                <a:latin typeface="Calibri"/>
+                <a:ea typeface="Calibri"/>
+              </a:rPr>
+              <a:t>Risks are real: </a:t>
+            </a:r>
+            <a:r>
+              <a:rPr lang="en-US" sz="1500" b="0" u="none" strike="noStrike">
+                <a:solidFill>
+                  <a:srgbClr val="FFFFFF"/>
+                </a:solidFill>
+                <a:effectLst/>
+                <a:uFillTx/>
+                <a:latin typeface="Calibri"/>
+                <a:ea typeface="Calibri"/>
+              </a:rPr>
+              <a:t>autonomous weapons, surveillance, bias, employment disruption, misaligned superintelligence</a:t>
+            </a:r>
+            <a:r>
               <a:rPr lang="en-US" sz="1300" b="0" u="none" strike="noStrike">
                 <a:solidFill>
                   <a:srgbClr val="FFFFFF"/>
@@ -14239,7 +14476,7 @@
                 <a:latin typeface="Calibri"/>
                 <a:ea typeface="Calibri"/>
               </a:rPr>
-              <a:t>Risks are real: autonomous weapons, surveillance, bias, employment disruption, misaligned superintelligence.</a:t>
+              <a:t>.</a:t>
             </a:r>
             <a:endParaRPr lang="en-US" sz="1300" b="0" u="none" strike="noStrike">
               <a:solidFill>
@@ -14298,7 +14535,7 @@
         <p:spPr>
           <a:xfrm>
             <a:off x="0" y="0"/>
-            <a:ext cx="163800" cy="5142960"/>
+            <a:ext cx="163440" cy="5142600"/>
           </a:xfrm>
           <a:prstGeom prst="rect">
             <a:avLst/>
@@ -14320,7 +14557,7 @@
           <a:fontRef idx="minor"/>
         </p:style>
         <p:txBody>
-          <a:bodyPr lIns="82080" tIns="45000" rIns="82080" bIns="45000" anchor="t">
+          <a:bodyPr lIns="81720" tIns="45000" rIns="81720" bIns="45000" anchor="t">
             <a:noAutofit/>
           </a:bodyPr>
           <a:p>
@@ -14344,7 +14581,7 @@
         <p:spPr>
           <a:xfrm>
             <a:off x="457200" y="822960"/>
-            <a:ext cx="8228880" cy="502200"/>
+            <a:ext cx="8228520" cy="501840"/>
           </a:xfrm>
           <a:prstGeom prst="rect">
             <a:avLst/>
@@ -14405,7 +14642,7 @@
         <p:spPr>
           <a:xfrm>
             <a:off x="457200" y="1417320"/>
-            <a:ext cx="8228880" cy="1005120"/>
+            <a:ext cx="8228520" cy="1004760"/>
           </a:xfrm>
           <a:prstGeom prst="rect">
             <a:avLst/>
@@ -14466,7 +14703,7 @@
         <p:spPr>
           <a:xfrm>
             <a:off x="457200" y="2514600"/>
-            <a:ext cx="8228880" cy="456480"/>
+            <a:ext cx="8228520" cy="456120"/>
           </a:xfrm>
           <a:prstGeom prst="rect">
             <a:avLst/>
@@ -14544,7 +14781,7 @@
         <p:spPr>
           <a:xfrm>
             <a:off x="0" y="0"/>
-            <a:ext cx="9143280" cy="776520"/>
+            <a:ext cx="9142920" cy="776160"/>
           </a:xfrm>
           <a:prstGeom prst="rect">
             <a:avLst/>
@@ -14590,7 +14827,7 @@
         <p:spPr>
           <a:xfrm>
             <a:off x="0" y="777240"/>
-            <a:ext cx="9143280" cy="63360"/>
+            <a:ext cx="9142920" cy="63000"/>
           </a:xfrm>
           <a:prstGeom prst="rect">
             <a:avLst/>
@@ -14636,7 +14873,7 @@
         <p:spPr>
           <a:xfrm>
             <a:off x="320040" y="0"/>
-            <a:ext cx="8503200" cy="776520"/>
+            <a:ext cx="8502840" cy="776160"/>
           </a:xfrm>
           <a:prstGeom prst="rect">
             <a:avLst/>
@@ -14697,7 +14934,7 @@
         <p:spPr>
           <a:xfrm>
             <a:off x="365760" y="960120"/>
-            <a:ext cx="8411760" cy="3976920"/>
+            <a:ext cx="8411400" cy="3976560"/>
           </a:xfrm>
           <a:prstGeom prst="rect">
             <a:avLst/>
@@ -15185,7 +15422,7 @@
         <p:spPr>
           <a:xfrm>
             <a:off x="0" y="0"/>
-            <a:ext cx="9143280" cy="776520"/>
+            <a:ext cx="9142920" cy="776160"/>
           </a:xfrm>
           <a:prstGeom prst="rect">
             <a:avLst/>
@@ -15231,7 +15468,7 @@
         <p:spPr>
           <a:xfrm>
             <a:off x="0" y="777240"/>
-            <a:ext cx="9143280" cy="63360"/>
+            <a:ext cx="9142920" cy="63000"/>
           </a:xfrm>
           <a:prstGeom prst="rect">
             <a:avLst/>
@@ -15277,7 +15514,7 @@
         <p:spPr>
           <a:xfrm>
             <a:off x="320040" y="0"/>
-            <a:ext cx="8503200" cy="776520"/>
+            <a:ext cx="8502840" cy="776160"/>
           </a:xfrm>
           <a:prstGeom prst="rect">
             <a:avLst/>
@@ -15338,7 +15575,7 @@
         <p:spPr>
           <a:xfrm>
             <a:off x="365760" y="960120"/>
-            <a:ext cx="8411760" cy="3976920"/>
+            <a:ext cx="8411400" cy="3976560"/>
           </a:xfrm>
           <a:prstGeom prst="rect">
             <a:avLst/>
@@ -15861,7 +16098,7 @@
         <p:spPr>
           <a:xfrm>
             <a:off x="0" y="0"/>
-            <a:ext cx="163800" cy="5142960"/>
+            <a:ext cx="163440" cy="5142600"/>
           </a:xfrm>
           <a:prstGeom prst="rect">
             <a:avLst/>
@@ -15883,7 +16120,7 @@
           <a:fontRef idx="minor"/>
         </p:style>
         <p:txBody>
-          <a:bodyPr lIns="82080" tIns="45000" rIns="82080" bIns="45000" anchor="t">
+          <a:bodyPr lIns="81720" tIns="45000" rIns="81720" bIns="45000" anchor="t">
             <a:noAutofit/>
           </a:bodyPr>
           <a:p>
@@ -15907,7 +16144,7 @@
         <p:spPr>
           <a:xfrm>
             <a:off x="164520" y="4389120"/>
-            <a:ext cx="8978760" cy="753840"/>
+            <a:ext cx="8978400" cy="753480"/>
           </a:xfrm>
           <a:prstGeom prst="rect">
             <a:avLst/>
@@ -15953,7 +16190,7 @@
         <p:spPr>
           <a:xfrm>
             <a:off x="457200" y="914400"/>
-            <a:ext cx="8228880" cy="1645200"/>
+            <a:ext cx="8228520" cy="1644840"/>
           </a:xfrm>
           <a:prstGeom prst="rect">
             <a:avLst/>
@@ -16044,7 +16281,7 @@
         <p:spPr>
           <a:xfrm>
             <a:off x="457200" y="2651760"/>
-            <a:ext cx="8228880" cy="593640"/>
+            <a:ext cx="8228520" cy="593280"/>
           </a:xfrm>
           <a:prstGeom prst="rect">
             <a:avLst/>
@@ -16105,7 +16342,7 @@
         <p:spPr>
           <a:xfrm>
             <a:off x="457200" y="4480560"/>
-            <a:ext cx="8228880" cy="456480"/>
+            <a:ext cx="8228520" cy="456120"/>
           </a:xfrm>
           <a:prstGeom prst="rect">
             <a:avLst/>
@@ -16203,7 +16440,7 @@
         <p:spPr>
           <a:xfrm>
             <a:off x="0" y="0"/>
-            <a:ext cx="9143280" cy="776520"/>
+            <a:ext cx="9142920" cy="776160"/>
           </a:xfrm>
           <a:prstGeom prst="rect">
             <a:avLst/>
@@ -16249,7 +16486,7 @@
         <p:spPr>
           <a:xfrm>
             <a:off x="0" y="777240"/>
-            <a:ext cx="9143280" cy="63360"/>
+            <a:ext cx="9142920" cy="63000"/>
           </a:xfrm>
           <a:prstGeom prst="rect">
             <a:avLst/>
@@ -16295,7 +16532,7 @@
         <p:spPr>
           <a:xfrm>
             <a:off x="320040" y="0"/>
-            <a:ext cx="8503200" cy="776520"/>
+            <a:ext cx="8502840" cy="776160"/>
           </a:xfrm>
           <a:prstGeom prst="rect">
             <a:avLst/>
@@ -16356,7 +16593,7 @@
         <p:spPr>
           <a:xfrm>
             <a:off x="365760" y="960120"/>
-            <a:ext cx="8411760" cy="3976920"/>
+            <a:ext cx="8411400" cy="3976560"/>
           </a:xfrm>
           <a:prstGeom prst="rect">
             <a:avLst/>
@@ -16774,7 +17011,7 @@
         <p:spPr>
           <a:xfrm>
             <a:off x="0" y="0"/>
-            <a:ext cx="9143280" cy="776520"/>
+            <a:ext cx="9142920" cy="776160"/>
           </a:xfrm>
           <a:prstGeom prst="rect">
             <a:avLst/>
@@ -16820,7 +17057,7 @@
         <p:spPr>
           <a:xfrm>
             <a:off x="0" y="777240"/>
-            <a:ext cx="9143280" cy="63360"/>
+            <a:ext cx="9142920" cy="63000"/>
           </a:xfrm>
           <a:prstGeom prst="rect">
             <a:avLst/>
@@ -16866,7 +17103,7 @@
         <p:spPr>
           <a:xfrm>
             <a:off x="320040" y="0"/>
-            <a:ext cx="8503200" cy="776520"/>
+            <a:ext cx="8502840" cy="776160"/>
           </a:xfrm>
           <a:prstGeom prst="rect">
             <a:avLst/>
@@ -16927,7 +17164,7 @@
         <p:spPr>
           <a:xfrm>
             <a:off x="365760" y="960120"/>
-            <a:ext cx="8411760" cy="3976920"/>
+            <a:ext cx="8411400" cy="3976560"/>
           </a:xfrm>
           <a:prstGeom prst="rect">
             <a:avLst/>
@@ -17415,7 +17652,7 @@
         <p:spPr>
           <a:xfrm>
             <a:off x="0" y="0"/>
-            <a:ext cx="9143280" cy="776520"/>
+            <a:ext cx="9142920" cy="776160"/>
           </a:xfrm>
           <a:prstGeom prst="rect">
             <a:avLst/>
@@ -17461,7 +17698,7 @@
         <p:spPr>
           <a:xfrm>
             <a:off x="0" y="777240"/>
-            <a:ext cx="9143280" cy="63360"/>
+            <a:ext cx="9142920" cy="63000"/>
           </a:xfrm>
           <a:prstGeom prst="rect">
             <a:avLst/>
@@ -17507,7 +17744,7 @@
         <p:spPr>
           <a:xfrm>
             <a:off x="320040" y="0"/>
-            <a:ext cx="8503200" cy="776520"/>
+            <a:ext cx="8502840" cy="776160"/>
           </a:xfrm>
           <a:prstGeom prst="rect">
             <a:avLst/>
@@ -17568,7 +17805,7 @@
         <p:spPr>
           <a:xfrm>
             <a:off x="320040" y="1005840"/>
-            <a:ext cx="3931200" cy="3839760"/>
+            <a:ext cx="3930840" cy="3839400"/>
           </a:xfrm>
           <a:prstGeom prst="rect">
             <a:avLst/>
@@ -17621,7 +17858,7 @@
         <p:spPr>
           <a:xfrm>
             <a:off x="320040" y="1005840"/>
-            <a:ext cx="3931200" cy="410760"/>
+            <a:ext cx="3930840" cy="410400"/>
           </a:xfrm>
           <a:prstGeom prst="rect">
             <a:avLst/>
@@ -17667,7 +17904,7 @@
         <p:spPr>
           <a:xfrm>
             <a:off x="320040" y="1005840"/>
-            <a:ext cx="3931200" cy="410760"/>
+            <a:ext cx="3930840" cy="410400"/>
           </a:xfrm>
           <a:prstGeom prst="rect">
             <a:avLst/>
@@ -17728,7 +17965,7 @@
         <p:spPr>
           <a:xfrm>
             <a:off x="457200" y="1508760"/>
-            <a:ext cx="3656880" cy="3199680"/>
+            <a:ext cx="3656520" cy="3199320"/>
           </a:xfrm>
           <a:prstGeom prst="rect">
             <a:avLst/>
@@ -17934,7 +18171,7 @@
         <p:spPr>
           <a:xfrm>
             <a:off x="4892040" y="1005840"/>
-            <a:ext cx="3931200" cy="3839760"/>
+            <a:ext cx="3930840" cy="3839400"/>
           </a:xfrm>
           <a:prstGeom prst="rect">
             <a:avLst/>
@@ -17987,7 +18224,7 @@
         <p:spPr>
           <a:xfrm>
             <a:off x="4892040" y="1005840"/>
-            <a:ext cx="3931200" cy="410760"/>
+            <a:ext cx="3930840" cy="410400"/>
           </a:xfrm>
           <a:prstGeom prst="rect">
             <a:avLst/>
@@ -18033,7 +18270,7 @@
         <p:spPr>
           <a:xfrm>
             <a:off x="4892040" y="1005840"/>
-            <a:ext cx="3931200" cy="410760"/>
+            <a:ext cx="3930840" cy="410400"/>
           </a:xfrm>
           <a:prstGeom prst="rect">
             <a:avLst/>
@@ -18094,7 +18331,7 @@
         <p:spPr>
           <a:xfrm>
             <a:off x="5029200" y="1508760"/>
-            <a:ext cx="3656880" cy="3199680"/>
+            <a:ext cx="3656520" cy="3199320"/>
           </a:xfrm>
           <a:prstGeom prst="rect">
             <a:avLst/>
@@ -18337,7 +18574,7 @@
         <p:spPr>
           <a:xfrm>
             <a:off x="0" y="0"/>
-            <a:ext cx="9143280" cy="776520"/>
+            <a:ext cx="9142920" cy="776160"/>
           </a:xfrm>
           <a:prstGeom prst="rect">
             <a:avLst/>
@@ -18383,7 +18620,7 @@
         <p:spPr>
           <a:xfrm>
             <a:off x="0" y="777240"/>
-            <a:ext cx="9143280" cy="63360"/>
+            <a:ext cx="9142920" cy="63000"/>
           </a:xfrm>
           <a:prstGeom prst="rect">
             <a:avLst/>
@@ -18429,7 +18666,7 @@
         <p:spPr>
           <a:xfrm>
             <a:off x="320040" y="0"/>
-            <a:ext cx="8503200" cy="776520"/>
+            <a:ext cx="8502840" cy="776160"/>
           </a:xfrm>
           <a:prstGeom prst="rect">
             <a:avLst/>
@@ -18490,7 +18727,7 @@
         <p:spPr>
           <a:xfrm>
             <a:off x="365760" y="960120"/>
-            <a:ext cx="8411760" cy="3976920"/>
+            <a:ext cx="8411400" cy="3976560"/>
           </a:xfrm>
           <a:prstGeom prst="rect">
             <a:avLst/>
@@ -19013,7 +19250,7 @@
         <p:spPr>
           <a:xfrm>
             <a:off x="0" y="0"/>
-            <a:ext cx="9143280" cy="776520"/>
+            <a:ext cx="9142920" cy="776160"/>
           </a:xfrm>
           <a:prstGeom prst="rect">
             <a:avLst/>
@@ -19059,7 +19296,7 @@
         <p:spPr>
           <a:xfrm>
             <a:off x="0" y="777240"/>
-            <a:ext cx="9143280" cy="63360"/>
+            <a:ext cx="9142920" cy="63000"/>
           </a:xfrm>
           <a:prstGeom prst="rect">
             <a:avLst/>
@@ -19105,7 +19342,7 @@
         <p:spPr>
           <a:xfrm>
             <a:off x="320040" y="0"/>
-            <a:ext cx="8503200" cy="776520"/>
+            <a:ext cx="8502840" cy="776160"/>
           </a:xfrm>
           <a:prstGeom prst="rect">
             <a:avLst/>
@@ -19166,7 +19403,7 @@
         <p:spPr>
           <a:xfrm>
             <a:off x="274320" y="960120"/>
-            <a:ext cx="4114080" cy="822240"/>
+            <a:ext cx="4113720" cy="821880"/>
           </a:xfrm>
           <a:prstGeom prst="rect">
             <a:avLst/>
@@ -19219,7 +19456,7 @@
         <p:spPr>
           <a:xfrm>
             <a:off x="274320" y="960120"/>
-            <a:ext cx="2056680" cy="822240"/>
+            <a:ext cx="2056320" cy="821880"/>
           </a:xfrm>
           <a:prstGeom prst="rect">
             <a:avLst/>
@@ -19265,7 +19502,7 @@
         <p:spPr>
           <a:xfrm>
             <a:off x="365760" y="1005840"/>
-            <a:ext cx="1919520" cy="730800"/>
+            <a:ext cx="1919160" cy="730440"/>
           </a:xfrm>
           <a:prstGeom prst="rect">
             <a:avLst/>
@@ -19369,7 +19606,7 @@
         <p:spPr>
           <a:xfrm>
             <a:off x="2423160" y="1005840"/>
-            <a:ext cx="1919520" cy="730800"/>
+            <a:ext cx="1919160" cy="730440"/>
           </a:xfrm>
           <a:prstGeom prst="rect">
             <a:avLst/>
@@ -19430,7 +19667,7 @@
         <p:spPr>
           <a:xfrm>
             <a:off x="274320" y="1965960"/>
-            <a:ext cx="4114080" cy="822240"/>
+            <a:ext cx="4113720" cy="821880"/>
           </a:xfrm>
           <a:prstGeom prst="rect">
             <a:avLst/>
@@ -19483,7 +19720,7 @@
         <p:spPr>
           <a:xfrm>
             <a:off x="274320" y="1965960"/>
-            <a:ext cx="2056680" cy="822240"/>
+            <a:ext cx="2056320" cy="821880"/>
           </a:xfrm>
           <a:prstGeom prst="rect">
             <a:avLst/>
@@ -19529,7 +19766,7 @@
         <p:spPr>
           <a:xfrm>
             <a:off x="365760" y="2011680"/>
-            <a:ext cx="1919520" cy="730800"/>
+            <a:ext cx="1919160" cy="730440"/>
           </a:xfrm>
           <a:prstGeom prst="rect">
             <a:avLst/>
@@ -19633,7 +19870,7 @@
         <p:spPr>
           <a:xfrm>
             <a:off x="2423160" y="2011680"/>
-            <a:ext cx="1919520" cy="730800"/>
+            <a:ext cx="1919160" cy="730440"/>
           </a:xfrm>
           <a:prstGeom prst="rect">
             <a:avLst/>
@@ -19694,7 +19931,7 @@
         <p:spPr>
           <a:xfrm>
             <a:off x="274320" y="2971800"/>
-            <a:ext cx="4114080" cy="822240"/>
+            <a:ext cx="4113720" cy="821880"/>
           </a:xfrm>
           <a:prstGeom prst="rect">
             <a:avLst/>
@@ -19747,7 +19984,7 @@
         <p:spPr>
           <a:xfrm>
             <a:off x="274320" y="2971800"/>
-            <a:ext cx="2056680" cy="822240"/>
+            <a:ext cx="2056320" cy="821880"/>
           </a:xfrm>
           <a:prstGeom prst="rect">
             <a:avLst/>
@@ -19793,7 +20030,7 @@
         <p:spPr>
           <a:xfrm>
             <a:off x="365760" y="3017520"/>
-            <a:ext cx="1919520" cy="730800"/>
+            <a:ext cx="1919160" cy="730440"/>
           </a:xfrm>
           <a:prstGeom prst="rect">
             <a:avLst/>
@@ -19897,7 +20134,7 @@
         <p:spPr>
           <a:xfrm>
             <a:off x="2423160" y="3017520"/>
-            <a:ext cx="1919520" cy="730800"/>
+            <a:ext cx="1919160" cy="730440"/>
           </a:xfrm>
           <a:prstGeom prst="rect">
             <a:avLst/>
@@ -19958,7 +20195,7 @@
         <p:spPr>
           <a:xfrm>
             <a:off x="274320" y="3977640"/>
-            <a:ext cx="4114080" cy="822240"/>
+            <a:ext cx="4113720" cy="821880"/>
           </a:xfrm>
           <a:prstGeom prst="rect">
             <a:avLst/>
@@ -20011,7 +20248,7 @@
         <p:spPr>
           <a:xfrm>
             <a:off x="274320" y="3977640"/>
-            <a:ext cx="2056680" cy="822240"/>
+            <a:ext cx="2056320" cy="821880"/>
           </a:xfrm>
           <a:prstGeom prst="rect">
             <a:avLst/>
@@ -20057,7 +20294,7 @@
         <p:spPr>
           <a:xfrm>
             <a:off x="365760" y="4023360"/>
-            <a:ext cx="1919520" cy="730800"/>
+            <a:ext cx="1919160" cy="730440"/>
           </a:xfrm>
           <a:prstGeom prst="rect">
             <a:avLst/>
@@ -20161,7 +20398,7 @@
         <p:spPr>
           <a:xfrm>
             <a:off x="2423160" y="4023360"/>
-            <a:ext cx="1919520" cy="730800"/>
+            <a:ext cx="1919160" cy="730440"/>
           </a:xfrm>
           <a:prstGeom prst="rect">
             <a:avLst/>
@@ -20222,7 +20459,7 @@
         <p:spPr>
           <a:xfrm>
             <a:off x="4709160" y="960120"/>
-            <a:ext cx="4114080" cy="822240"/>
+            <a:ext cx="4113720" cy="821880"/>
           </a:xfrm>
           <a:prstGeom prst="rect">
             <a:avLst/>
@@ -20275,7 +20512,7 @@
         <p:spPr>
           <a:xfrm>
             <a:off x="4709160" y="960120"/>
-            <a:ext cx="2056680" cy="822240"/>
+            <a:ext cx="2056320" cy="821880"/>
           </a:xfrm>
           <a:prstGeom prst="rect">
             <a:avLst/>
@@ -20321,7 +20558,7 @@
         <p:spPr>
           <a:xfrm>
             <a:off x="4800600" y="1005840"/>
-            <a:ext cx="1919520" cy="730800"/>
+            <a:ext cx="1919160" cy="730440"/>
           </a:xfrm>
           <a:prstGeom prst="rect">
             <a:avLst/>
@@ -20425,7 +20662,7 @@
         <p:spPr>
           <a:xfrm>
             <a:off x="6858000" y="1005840"/>
-            <a:ext cx="1919520" cy="730800"/>
+            <a:ext cx="1919160" cy="730440"/>
           </a:xfrm>
           <a:prstGeom prst="rect">
             <a:avLst/>
@@ -20486,7 +20723,7 @@
         <p:spPr>
           <a:xfrm>
             <a:off x="4709160" y="1965960"/>
-            <a:ext cx="4114080" cy="822240"/>
+            <a:ext cx="4113720" cy="821880"/>
           </a:xfrm>
           <a:prstGeom prst="rect">
             <a:avLst/>
@@ -20539,7 +20776,7 @@
         <p:spPr>
           <a:xfrm>
             <a:off x="4709160" y="1965960"/>
-            <a:ext cx="2056680" cy="822240"/>
+            <a:ext cx="2056320" cy="821880"/>
           </a:xfrm>
           <a:prstGeom prst="rect">
             <a:avLst/>
@@ -20585,7 +20822,7 @@
         <p:spPr>
           <a:xfrm>
             <a:off x="4800600" y="2011680"/>
-            <a:ext cx="1919520" cy="730800"/>
+            <a:ext cx="1919160" cy="730440"/>
           </a:xfrm>
           <a:prstGeom prst="rect">
             <a:avLst/>
@@ -20689,7 +20926,7 @@
         <p:spPr>
           <a:xfrm>
             <a:off x="6858000" y="2011680"/>
-            <a:ext cx="1919520" cy="730800"/>
+            <a:ext cx="1919160" cy="730440"/>
           </a:xfrm>
           <a:prstGeom prst="rect">
             <a:avLst/>
@@ -20750,7 +20987,7 @@
         <p:spPr>
           <a:xfrm>
             <a:off x="4709160" y="2971800"/>
-            <a:ext cx="4114080" cy="822240"/>
+            <a:ext cx="4113720" cy="821880"/>
           </a:xfrm>
           <a:prstGeom prst="rect">
             <a:avLst/>
@@ -20803,7 +21040,7 @@
         <p:spPr>
           <a:xfrm>
             <a:off x="4709160" y="2971800"/>
-            <a:ext cx="2056680" cy="822240"/>
+            <a:ext cx="2056320" cy="821880"/>
           </a:xfrm>
           <a:prstGeom prst="rect">
             <a:avLst/>
@@ -20849,7 +21086,7 @@
         <p:spPr>
           <a:xfrm>
             <a:off x="4800600" y="3017520"/>
-            <a:ext cx="1919520" cy="730800"/>
+            <a:ext cx="1919160" cy="730440"/>
           </a:xfrm>
           <a:prstGeom prst="rect">
             <a:avLst/>
@@ -20953,7 +21190,7 @@
         <p:spPr>
           <a:xfrm>
             <a:off x="6858000" y="3017520"/>
-            <a:ext cx="1919520" cy="730800"/>
+            <a:ext cx="1919160" cy="730440"/>
           </a:xfrm>
           <a:prstGeom prst="rect">
             <a:avLst/>
@@ -21014,7 +21251,7 @@
         <p:spPr>
           <a:xfrm>
             <a:off x="4709160" y="4114800"/>
-            <a:ext cx="4114080" cy="822240"/>
+            <a:ext cx="4113720" cy="821880"/>
           </a:xfrm>
           <a:prstGeom prst="rect">
             <a:avLst/>
@@ -21060,7 +21297,7 @@
         <p:spPr>
           <a:xfrm>
             <a:off x="4709160" y="4114800"/>
-            <a:ext cx="4114080" cy="822240"/>
+            <a:ext cx="4113720" cy="821880"/>
           </a:xfrm>
           <a:prstGeom prst="rect">
             <a:avLst/>
@@ -21158,7 +21395,7 @@
         <p:spPr>
           <a:xfrm>
             <a:off x="0" y="0"/>
-            <a:ext cx="9143280" cy="776520"/>
+            <a:ext cx="9142920" cy="776160"/>
           </a:xfrm>
           <a:prstGeom prst="rect">
             <a:avLst/>
@@ -21204,7 +21441,7 @@
         <p:spPr>
           <a:xfrm>
             <a:off x="0" y="777240"/>
-            <a:ext cx="9143280" cy="63360"/>
+            <a:ext cx="9142920" cy="63000"/>
           </a:xfrm>
           <a:prstGeom prst="rect">
             <a:avLst/>
@@ -21250,7 +21487,7 @@
         <p:spPr>
           <a:xfrm>
             <a:off x="320040" y="0"/>
-            <a:ext cx="8503200" cy="776520"/>
+            <a:ext cx="8502840" cy="776160"/>
           </a:xfrm>
           <a:prstGeom prst="rect">
             <a:avLst/>
@@ -21311,7 +21548,7 @@
         <p:spPr>
           <a:xfrm>
             <a:off x="320040" y="960120"/>
-            <a:ext cx="8503200" cy="547920"/>
+            <a:ext cx="8502840" cy="547560"/>
           </a:xfrm>
           <a:prstGeom prst="rect">
             <a:avLst/>
@@ -21357,7 +21594,7 @@
         <p:spPr>
           <a:xfrm>
             <a:off x="320040" y="960120"/>
-            <a:ext cx="8503200" cy="547920"/>
+            <a:ext cx="8502840" cy="547560"/>
           </a:xfrm>
           <a:prstGeom prst="rect">
             <a:avLst/>
@@ -21418,7 +21655,7 @@
         <p:spPr>
           <a:xfrm>
             <a:off x="320040" y="1645920"/>
-            <a:ext cx="8503200" cy="959400"/>
+            <a:ext cx="8502840" cy="959040"/>
           </a:xfrm>
           <a:prstGeom prst="rect">
             <a:avLst/>
@@ -21464,7 +21701,7 @@
         <p:spPr>
           <a:xfrm>
             <a:off x="502920" y="1691640"/>
-            <a:ext cx="8228880" cy="867960"/>
+            <a:ext cx="8228520" cy="867600"/>
           </a:xfrm>
           <a:prstGeom prst="rect">
             <a:avLst/>
@@ -21525,7 +21762,7 @@
         <p:spPr>
           <a:xfrm>
             <a:off x="320040" y="2715840"/>
-            <a:ext cx="4114080" cy="319320"/>
+            <a:ext cx="4113720" cy="318960"/>
           </a:xfrm>
           <a:prstGeom prst="rect">
             <a:avLst/>
@@ -21586,7 +21823,7 @@
         <p:spPr>
           <a:xfrm>
             <a:off x="320040" y="3017520"/>
-            <a:ext cx="4388400" cy="1736640"/>
+            <a:ext cx="4388040" cy="1736280"/>
           </a:xfrm>
           <a:prstGeom prst="rect">
             <a:avLst/>
@@ -21792,7 +22029,7 @@
         <p:spPr>
           <a:xfrm>
             <a:off x="4892040" y="2715840"/>
-            <a:ext cx="3931200" cy="2102400"/>
+            <a:ext cx="3930840" cy="2102040"/>
           </a:xfrm>
           <a:prstGeom prst="rect">
             <a:avLst/>
@@ -21838,7 +22075,7 @@
         <p:spPr>
           <a:xfrm>
             <a:off x="4892040" y="2715840"/>
-            <a:ext cx="3931200" cy="346680"/>
+            <a:ext cx="3930840" cy="346320"/>
           </a:xfrm>
           <a:prstGeom prst="rect">
             <a:avLst/>
@@ -21884,7 +22121,7 @@
         <p:spPr>
           <a:xfrm>
             <a:off x="4892040" y="2715840"/>
-            <a:ext cx="3931200" cy="346680"/>
+            <a:ext cx="3930840" cy="346320"/>
           </a:xfrm>
           <a:prstGeom prst="rect">
             <a:avLst/>
@@ -21945,7 +22182,7 @@
         <p:spPr>
           <a:xfrm>
             <a:off x="4983480" y="3127320"/>
-            <a:ext cx="3748320" cy="1599480"/>
+            <a:ext cx="3747960" cy="1599120"/>
           </a:xfrm>
           <a:prstGeom prst="rect">
             <a:avLst/>
@@ -22043,7 +22280,7 @@
         <p:spPr>
           <a:xfrm>
             <a:off x="0" y="0"/>
-            <a:ext cx="9143280" cy="776520"/>
+            <a:ext cx="9142920" cy="776160"/>
           </a:xfrm>
           <a:prstGeom prst="rect">
             <a:avLst/>
@@ -22089,7 +22326,7 @@
         <p:spPr>
           <a:xfrm>
             <a:off x="0" y="777240"/>
-            <a:ext cx="9143280" cy="63360"/>
+            <a:ext cx="9142920" cy="63000"/>
           </a:xfrm>
           <a:prstGeom prst="rect">
             <a:avLst/>
@@ -22135,7 +22372,7 @@
         <p:spPr>
           <a:xfrm>
             <a:off x="320040" y="0"/>
-            <a:ext cx="8503200" cy="776520"/>
+            <a:ext cx="8502840" cy="776160"/>
           </a:xfrm>
           <a:prstGeom prst="rect">
             <a:avLst/>
@@ -22196,7 +22433,7 @@
         <p:spPr>
           <a:xfrm>
             <a:off x="320040" y="960120"/>
-            <a:ext cx="8503200" cy="547920"/>
+            <a:ext cx="8502840" cy="547560"/>
           </a:xfrm>
           <a:prstGeom prst="rect">
             <a:avLst/>
@@ -22242,7 +22479,7 @@
         <p:spPr>
           <a:xfrm>
             <a:off x="320040" y="960120"/>
-            <a:ext cx="8503200" cy="547920"/>
+            <a:ext cx="8502840" cy="547560"/>
           </a:xfrm>
           <a:prstGeom prst="rect">
             <a:avLst/>
@@ -22303,7 +22540,7 @@
         <p:spPr>
           <a:xfrm>
             <a:off x="320040" y="1645920"/>
-            <a:ext cx="8503200" cy="959400"/>
+            <a:ext cx="8502840" cy="959040"/>
           </a:xfrm>
           <a:prstGeom prst="rect">
             <a:avLst/>
@@ -22349,7 +22586,7 @@
         <p:spPr>
           <a:xfrm>
             <a:off x="502920" y="1691640"/>
-            <a:ext cx="8228880" cy="867960"/>
+            <a:ext cx="8228520" cy="867600"/>
           </a:xfrm>
           <a:prstGeom prst="rect">
             <a:avLst/>
@@ -22410,7 +22647,7 @@
         <p:spPr>
           <a:xfrm>
             <a:off x="320040" y="2715840"/>
-            <a:ext cx="4114080" cy="319320"/>
+            <a:ext cx="4113720" cy="318960"/>
           </a:xfrm>
           <a:prstGeom prst="rect">
             <a:avLst/>
@@ -22471,7 +22708,7 @@
         <p:spPr>
           <a:xfrm>
             <a:off x="320040" y="3017520"/>
-            <a:ext cx="4388400" cy="1736640"/>
+            <a:ext cx="4388040" cy="1736280"/>
           </a:xfrm>
           <a:prstGeom prst="rect">
             <a:avLst/>
@@ -22677,7 +22914,7 @@
         <p:spPr>
           <a:xfrm>
             <a:off x="4892040" y="2715840"/>
-            <a:ext cx="3931200" cy="2102400"/>
+            <a:ext cx="3930840" cy="2102040"/>
           </a:xfrm>
           <a:prstGeom prst="rect">
             <a:avLst/>
@@ -22723,7 +22960,7 @@
         <p:spPr>
           <a:xfrm>
             <a:off x="4892040" y="2715840"/>
-            <a:ext cx="3931200" cy="346680"/>
+            <a:ext cx="3930840" cy="346320"/>
           </a:xfrm>
           <a:prstGeom prst="rect">
             <a:avLst/>
@@ -22769,7 +23006,7 @@
         <p:spPr>
           <a:xfrm>
             <a:off x="4892040" y="2715840"/>
-            <a:ext cx="3931200" cy="346680"/>
+            <a:ext cx="3930840" cy="346320"/>
           </a:xfrm>
           <a:prstGeom prst="rect">
             <a:avLst/>
@@ -22830,7 +23067,7 @@
         <p:spPr>
           <a:xfrm>
             <a:off x="4983480" y="3127320"/>
-            <a:ext cx="3748320" cy="1599480"/>
+            <a:ext cx="3747960" cy="1599120"/>
           </a:xfrm>
           <a:prstGeom prst="rect">
             <a:avLst/>
@@ -22928,7 +23165,7 @@
         <p:spPr>
           <a:xfrm>
             <a:off x="0" y="0"/>
-            <a:ext cx="9143280" cy="776520"/>
+            <a:ext cx="9142920" cy="776160"/>
           </a:xfrm>
           <a:prstGeom prst="rect">
             <a:avLst/>
@@ -22974,7 +23211,7 @@
         <p:spPr>
           <a:xfrm>
             <a:off x="0" y="777240"/>
-            <a:ext cx="9143280" cy="63360"/>
+            <a:ext cx="9142920" cy="63000"/>
           </a:xfrm>
           <a:prstGeom prst="rect">
             <a:avLst/>
@@ -23020,7 +23257,7 @@
         <p:spPr>
           <a:xfrm>
             <a:off x="320040" y="0"/>
-            <a:ext cx="8503200" cy="776520"/>
+            <a:ext cx="8502840" cy="776160"/>
           </a:xfrm>
           <a:prstGeom prst="rect">
             <a:avLst/>
@@ -23081,7 +23318,7 @@
         <p:spPr>
           <a:xfrm>
             <a:off x="320040" y="960120"/>
-            <a:ext cx="8503200" cy="547920"/>
+            <a:ext cx="8502840" cy="547560"/>
           </a:xfrm>
           <a:prstGeom prst="rect">
             <a:avLst/>
@@ -23127,7 +23364,7 @@
         <p:spPr>
           <a:xfrm>
             <a:off x="320040" y="960120"/>
-            <a:ext cx="8503200" cy="547920"/>
+            <a:ext cx="8502840" cy="547560"/>
           </a:xfrm>
           <a:prstGeom prst="rect">
             <a:avLst/>
@@ -23188,7 +23425,7 @@
         <p:spPr>
           <a:xfrm>
             <a:off x="320040" y="1645920"/>
-            <a:ext cx="8503200" cy="959400"/>
+            <a:ext cx="8502840" cy="959040"/>
           </a:xfrm>
           <a:prstGeom prst="rect">
             <a:avLst/>
@@ -23234,7 +23471,7 @@
         <p:spPr>
           <a:xfrm>
             <a:off x="502920" y="1691640"/>
-            <a:ext cx="8228880" cy="867960"/>
+            <a:ext cx="8228520" cy="867600"/>
           </a:xfrm>
           <a:prstGeom prst="rect">
             <a:avLst/>
@@ -23295,7 +23532,7 @@
         <p:spPr>
           <a:xfrm>
             <a:off x="320040" y="2715840"/>
-            <a:ext cx="4114080" cy="319320"/>
+            <a:ext cx="4113720" cy="318960"/>
           </a:xfrm>
           <a:prstGeom prst="rect">
             <a:avLst/>
@@ -23356,7 +23593,7 @@
         <p:spPr>
           <a:xfrm>
             <a:off x="320040" y="3017520"/>
-            <a:ext cx="4388400" cy="1736640"/>
+            <a:ext cx="4388040" cy="1736280"/>
           </a:xfrm>
           <a:prstGeom prst="rect">
             <a:avLst/>
@@ -23562,7 +23799,7 @@
         <p:spPr>
           <a:xfrm>
             <a:off x="4892040" y="2715840"/>
-            <a:ext cx="3931200" cy="2102400"/>
+            <a:ext cx="3930840" cy="2102040"/>
           </a:xfrm>
           <a:prstGeom prst="rect">
             <a:avLst/>
@@ -23608,7 +23845,7 @@
         <p:spPr>
           <a:xfrm>
             <a:off x="4892040" y="2715840"/>
-            <a:ext cx="3931200" cy="346680"/>
+            <a:ext cx="3930840" cy="346320"/>
           </a:xfrm>
           <a:prstGeom prst="rect">
             <a:avLst/>
@@ -23654,7 +23891,7 @@
         <p:spPr>
           <a:xfrm>
             <a:off x="4892040" y="2715840"/>
-            <a:ext cx="3931200" cy="346680"/>
+            <a:ext cx="3930840" cy="346320"/>
           </a:xfrm>
           <a:prstGeom prst="rect">
             <a:avLst/>
@@ -23715,7 +23952,7 @@
         <p:spPr>
           <a:xfrm>
             <a:off x="4983480" y="3127320"/>
-            <a:ext cx="3748320" cy="1599480"/>
+            <a:ext cx="3747960" cy="1599120"/>
           </a:xfrm>
           <a:prstGeom prst="rect">
             <a:avLst/>
@@ -23813,7 +24050,7 @@
         <p:spPr>
           <a:xfrm>
             <a:off x="0" y="0"/>
-            <a:ext cx="9143280" cy="776520"/>
+            <a:ext cx="9142920" cy="776160"/>
           </a:xfrm>
           <a:prstGeom prst="rect">
             <a:avLst/>
@@ -23859,7 +24096,7 @@
         <p:spPr>
           <a:xfrm>
             <a:off x="0" y="777240"/>
-            <a:ext cx="9143280" cy="63360"/>
+            <a:ext cx="9142920" cy="63000"/>
           </a:xfrm>
           <a:prstGeom prst="rect">
             <a:avLst/>
@@ -23905,7 +24142,7 @@
         <p:spPr>
           <a:xfrm>
             <a:off x="320040" y="0"/>
-            <a:ext cx="8503200" cy="776520"/>
+            <a:ext cx="8502840" cy="776160"/>
           </a:xfrm>
           <a:prstGeom prst="rect">
             <a:avLst/>
@@ -23966,7 +24203,7 @@
         <p:spPr>
           <a:xfrm>
             <a:off x="320040" y="960120"/>
-            <a:ext cx="8503200" cy="547920"/>
+            <a:ext cx="8502840" cy="547560"/>
           </a:xfrm>
           <a:prstGeom prst="rect">
             <a:avLst/>
@@ -24012,7 +24249,7 @@
         <p:spPr>
           <a:xfrm>
             <a:off x="320040" y="960120"/>
-            <a:ext cx="8503200" cy="547920"/>
+            <a:ext cx="8502840" cy="547560"/>
           </a:xfrm>
           <a:prstGeom prst="rect">
             <a:avLst/>
@@ -24073,7 +24310,7 @@
         <p:spPr>
           <a:xfrm>
             <a:off x="320040" y="1645920"/>
-            <a:ext cx="8503200" cy="959400"/>
+            <a:ext cx="8502840" cy="959040"/>
           </a:xfrm>
           <a:prstGeom prst="rect">
             <a:avLst/>
@@ -24119,7 +24356,7 @@
         <p:spPr>
           <a:xfrm>
             <a:off x="502920" y="1691640"/>
-            <a:ext cx="8228880" cy="867960"/>
+            <a:ext cx="8228520" cy="867600"/>
           </a:xfrm>
           <a:prstGeom prst="rect">
             <a:avLst/>
@@ -24180,7 +24417,7 @@
         <p:spPr>
           <a:xfrm>
             <a:off x="320040" y="2715840"/>
-            <a:ext cx="4114080" cy="319320"/>
+            <a:ext cx="4113720" cy="318960"/>
           </a:xfrm>
           <a:prstGeom prst="rect">
             <a:avLst/>
@@ -24241,7 +24478,7 @@
         <p:spPr>
           <a:xfrm>
             <a:off x="320040" y="3017520"/>
-            <a:ext cx="4388400" cy="1736640"/>
+            <a:ext cx="4388040" cy="1736280"/>
           </a:xfrm>
           <a:prstGeom prst="rect">
             <a:avLst/>
@@ -24447,7 +24684,7 @@
         <p:spPr>
           <a:xfrm>
             <a:off x="4892040" y="2715840"/>
-            <a:ext cx="3931200" cy="2102400"/>
+            <a:ext cx="3930840" cy="2102040"/>
           </a:xfrm>
           <a:prstGeom prst="rect">
             <a:avLst/>
@@ -24493,7 +24730,7 @@
         <p:spPr>
           <a:xfrm>
             <a:off x="4892040" y="2715840"/>
-            <a:ext cx="3931200" cy="346680"/>
+            <a:ext cx="3930840" cy="346320"/>
           </a:xfrm>
           <a:prstGeom prst="rect">
             <a:avLst/>
@@ -24539,7 +24776,7 @@
         <p:spPr>
           <a:xfrm>
             <a:off x="4892040" y="2715840"/>
-            <a:ext cx="3931200" cy="346680"/>
+            <a:ext cx="3930840" cy="346320"/>
           </a:xfrm>
           <a:prstGeom prst="rect">
             <a:avLst/>
@@ -24600,7 +24837,7 @@
         <p:spPr>
           <a:xfrm>
             <a:off x="4983480" y="3127320"/>
-            <a:ext cx="3748320" cy="1599480"/>
+            <a:ext cx="3747960" cy="1599120"/>
           </a:xfrm>
           <a:prstGeom prst="rect">
             <a:avLst/>
@@ -24698,7 +24935,7 @@
         <p:spPr>
           <a:xfrm>
             <a:off x="0" y="0"/>
-            <a:ext cx="9143280" cy="776520"/>
+            <a:ext cx="9142920" cy="776160"/>
           </a:xfrm>
           <a:prstGeom prst="rect">
             <a:avLst/>
@@ -24744,7 +24981,7 @@
         <p:spPr>
           <a:xfrm>
             <a:off x="0" y="777240"/>
-            <a:ext cx="9143280" cy="63360"/>
+            <a:ext cx="9142920" cy="63000"/>
           </a:xfrm>
           <a:prstGeom prst="rect">
             <a:avLst/>
@@ -24790,7 +25027,7 @@
         <p:spPr>
           <a:xfrm>
             <a:off x="320040" y="0"/>
-            <a:ext cx="8503200" cy="776520"/>
+            <a:ext cx="8502840" cy="776160"/>
           </a:xfrm>
           <a:prstGeom prst="rect">
             <a:avLst/>
@@ -24851,7 +25088,7 @@
         <p:spPr>
           <a:xfrm>
             <a:off x="365760" y="960120"/>
-            <a:ext cx="8411760" cy="3976920"/>
+            <a:ext cx="8411400" cy="3976560"/>
           </a:xfrm>
           <a:prstGeom prst="rect">
             <a:avLst/>
@@ -25374,7 +25611,7 @@
         <p:spPr>
           <a:xfrm>
             <a:off x="0" y="0"/>
-            <a:ext cx="9143280" cy="776520"/>
+            <a:ext cx="9142920" cy="776160"/>
           </a:xfrm>
           <a:prstGeom prst="rect">
             <a:avLst/>
@@ -25420,7 +25657,7 @@
         <p:spPr>
           <a:xfrm>
             <a:off x="0" y="777240"/>
-            <a:ext cx="9143280" cy="63360"/>
+            <a:ext cx="9142920" cy="63000"/>
           </a:xfrm>
           <a:prstGeom prst="rect">
             <a:avLst/>
@@ -25466,7 +25703,7 @@
         <p:spPr>
           <a:xfrm>
             <a:off x="320040" y="0"/>
-            <a:ext cx="8503200" cy="776520"/>
+            <a:ext cx="8502840" cy="776160"/>
           </a:xfrm>
           <a:prstGeom prst="rect">
             <a:avLst/>
@@ -25505,7 +25742,7 @@
                 <a:latin typeface="Calibri"/>
                 <a:ea typeface="Calibri"/>
               </a:rPr>
-              <a:t>Two-Hour Lecture Roadmap</a:t>
+              <a:t>Lecture Roadmap</a:t>
             </a:r>
             <a:endParaRPr lang="en-US" sz="2200" b="0" u="none" strike="noStrike">
               <a:solidFill>
@@ -25527,7 +25764,7 @@
         <p:spPr>
           <a:xfrm>
             <a:off x="365760" y="960120"/>
-            <a:ext cx="8411760" cy="3976920"/>
+            <a:ext cx="8411400" cy="3976560"/>
           </a:xfrm>
           <a:prstGeom prst="rect">
             <a:avLst/>
@@ -25552,15 +25789,27 @@
               <a:lnSpc>
                 <a:spcPct val="100000"/>
               </a:lnSpc>
-              <a:spcAft>
-                <a:spcPts val="201"/>
-              </a:spcAft>
               <a:buClr>
                 <a:srgbClr val="0F2B5B"/>
               </a:buClr>
               <a:buFont typeface="Symbol" charset="2"/>
               <a:buChar char=""/>
             </a:pPr>
+            <a:endParaRPr lang="en-US" sz="1500" b="0" u="none" strike="noStrike">
+              <a:solidFill>
+                <a:srgbClr val="000000"/>
+              </a:solidFill>
+              <a:effectLst/>
+              <a:uFillTx/>
+              <a:latin typeface="Arial"/>
+            </a:endParaRPr>
+          </a:p>
+          <a:p>
+            <a:pPr defTabSz="914400">
+              <a:lnSpc>
+                <a:spcPct val="100000"/>
+              </a:lnSpc>
+            </a:pPr>
             <a:r>
               <a:rPr lang="en-US" sz="1500" b="1" u="none" strike="noStrike">
                 <a:solidFill>
@@ -25571,7 +25820,7 @@
                 <a:latin typeface="Calibri"/>
                 <a:ea typeface="Calibri"/>
               </a:rPr>
-              <a:t>Part 1 — Chapter 1: Introduction to AI </a:t>
+              <a:t>Part 1 — Chapter 1: Introduction to AI</a:t>
             </a:r>
             <a:endParaRPr lang="en-US" sz="1500" b="0" u="none" strike="noStrike">
               <a:solidFill>
@@ -25583,188 +25832,10 @@
             </a:endParaRPr>
           </a:p>
           <a:p>
-            <a:pPr marL="685800" lvl="1" indent="-343080" defTabSz="914400">
-              <a:lnSpc>
-                <a:spcPct val="100000"/>
-              </a:lnSpc>
-              <a:spcAft>
-                <a:spcPts val="400"/>
-              </a:spcAft>
-              <a:buClr>
-                <a:srgbClr val="64748B"/>
-              </a:buClr>
-              <a:buFont typeface="Symbol" charset="2"/>
-              <a:buChar char=""/>
-            </a:pPr>
-            <a:r>
-              <a:rPr lang="en-US" sz="1300" b="0" u="none" strike="noStrike">
-                <a:solidFill>
-                  <a:srgbClr val="64748B"/>
-                </a:solidFill>
-                <a:effectLst/>
-                <a:uFillTx/>
-                <a:latin typeface="Calibri"/>
-                <a:ea typeface="Calibri"/>
-              </a:rPr>
-              <a:t>What is AI? Four approaches and the standard model</a:t>
-            </a:r>
-            <a:endParaRPr lang="en-US" sz="1300" b="0" u="none" strike="noStrike">
-              <a:solidFill>
-                <a:srgbClr val="000000"/>
-              </a:solidFill>
-              <a:effectLst/>
-              <a:uFillTx/>
-              <a:latin typeface="Arial"/>
-            </a:endParaRPr>
-          </a:p>
-          <a:p>
-            <a:pPr marL="685800" lvl="1" indent="-343080" defTabSz="914400">
-              <a:lnSpc>
-                <a:spcPct val="100000"/>
-              </a:lnSpc>
-              <a:spcAft>
-                <a:spcPts val="400"/>
-              </a:spcAft>
-              <a:buClr>
-                <a:srgbClr val="64748B"/>
-              </a:buClr>
-              <a:buFont typeface="Symbol" charset="2"/>
-              <a:buChar char=""/>
-            </a:pPr>
-            <a:r>
-              <a:rPr lang="en-US" sz="1300" b="0" u="none" strike="noStrike">
-                <a:solidFill>
-                  <a:srgbClr val="64748B"/>
-                </a:solidFill>
-                <a:effectLst/>
-                <a:uFillTx/>
-                <a:latin typeface="Calibri"/>
-                <a:ea typeface="Calibri"/>
-              </a:rPr>
-              <a:t>Foundations: Philosophy, Math, Economics, Neuroscience, Linguistics</a:t>
-            </a:r>
-            <a:endParaRPr lang="en-US" sz="1300" b="0" u="none" strike="noStrike">
-              <a:solidFill>
-                <a:srgbClr val="000000"/>
-              </a:solidFill>
-              <a:effectLst/>
-              <a:uFillTx/>
-              <a:latin typeface="Arial"/>
-            </a:endParaRPr>
-          </a:p>
-          <a:p>
-            <a:pPr marL="685800" lvl="1" indent="-343080" defTabSz="914400">
-              <a:lnSpc>
-                <a:spcPct val="100000"/>
-              </a:lnSpc>
-              <a:spcAft>
-                <a:spcPts val="400"/>
-              </a:spcAft>
-              <a:buClr>
-                <a:srgbClr val="64748B"/>
-              </a:buClr>
-              <a:buFont typeface="Symbol" charset="2"/>
-              <a:buChar char=""/>
-            </a:pPr>
-            <a:r>
-              <a:rPr lang="en-US" sz="1300" b="0" u="none" strike="noStrike">
-                <a:solidFill>
-                  <a:srgbClr val="64748B"/>
-                </a:solidFill>
-                <a:effectLst/>
-                <a:uFillTx/>
-                <a:latin typeface="Calibri"/>
-                <a:ea typeface="Calibri"/>
-              </a:rPr>
-              <a:t>History of AI: from inception to deep learning</a:t>
-            </a:r>
-            <a:endParaRPr lang="en-US" sz="1300" b="0" u="none" strike="noStrike">
-              <a:solidFill>
-                <a:srgbClr val="000000"/>
-              </a:solidFill>
-              <a:effectLst/>
-              <a:uFillTx/>
-              <a:latin typeface="Arial"/>
-            </a:endParaRPr>
-          </a:p>
-          <a:p>
-            <a:pPr marL="685800" lvl="1" indent="-343080" defTabSz="914400">
-              <a:lnSpc>
-                <a:spcPct val="100000"/>
-              </a:lnSpc>
-              <a:spcAft>
-                <a:spcPts val="400"/>
-              </a:spcAft>
-              <a:buClr>
-                <a:srgbClr val="64748B"/>
-              </a:buClr>
-              <a:buFont typeface="Symbol" charset="2"/>
-              <a:buChar char=""/>
-            </a:pPr>
-            <a:r>
-              <a:rPr lang="en-US" sz="1300" b="0" u="none" strike="noStrike">
-                <a:solidFill>
-                  <a:srgbClr val="64748B"/>
-                </a:solidFill>
-                <a:effectLst/>
-                <a:uFillTx/>
-                <a:latin typeface="Calibri"/>
-                <a:ea typeface="Calibri"/>
-              </a:rPr>
-              <a:t>State of the art and real-world applications</a:t>
-            </a:r>
-            <a:endParaRPr lang="en-US" sz="1300" b="0" u="none" strike="noStrike">
-              <a:solidFill>
-                <a:srgbClr val="000000"/>
-              </a:solidFill>
-              <a:effectLst/>
-              <a:uFillTx/>
-              <a:latin typeface="Arial"/>
-            </a:endParaRPr>
-          </a:p>
-          <a:p>
-            <a:pPr marL="685800" lvl="1" indent="-343080" defTabSz="914400">
-              <a:lnSpc>
-                <a:spcPct val="100000"/>
-              </a:lnSpc>
-              <a:spcAft>
-                <a:spcPts val="400"/>
-              </a:spcAft>
-              <a:buClr>
-                <a:srgbClr val="64748B"/>
-              </a:buClr>
-              <a:buFont typeface="Symbol" charset="2"/>
-              <a:buChar char=""/>
-            </a:pPr>
-            <a:r>
-              <a:rPr lang="en-US" sz="1300" b="0" u="none" strike="noStrike">
-                <a:solidFill>
-                  <a:srgbClr val="64748B"/>
-                </a:solidFill>
-                <a:effectLst/>
-                <a:uFillTx/>
-                <a:latin typeface="Calibri"/>
-                <a:ea typeface="Calibri"/>
-              </a:rPr>
-              <a:t>Risks &amp; benefits: autonomous weapons, bias, alignment</a:t>
-            </a:r>
-            <a:endParaRPr lang="en-US" sz="1300" b="0" u="none" strike="noStrike">
-              <a:solidFill>
-                <a:srgbClr val="000000"/>
-              </a:solidFill>
-              <a:effectLst/>
-              <a:uFillTx/>
-              <a:latin typeface="Arial"/>
-            </a:endParaRPr>
-          </a:p>
-          <a:p>
-            <a:pPr marL="343080" indent="-343080" defTabSz="914400">
-              <a:lnSpc>
-                <a:spcPct val="100000"/>
-              </a:lnSpc>
-              <a:spcAft>
-                <a:spcPts val="201"/>
-              </a:spcAft>
+            <a:pPr marL="360000" defTabSz="914400">
+              <a:lnSpc>
+                <a:spcPct val="100000"/>
+              </a:lnSpc>
               <a:buClr>
                 <a:srgbClr val="0F2B5B"/>
               </a:buClr>
@@ -25781,7 +25852,7 @@
                 <a:latin typeface="Calibri"/>
                 <a:ea typeface="Calibri"/>
               </a:rPr>
-              <a:t>Part 2 — Chapter 2: Intelligent Agents</a:t>
+              <a:t>What is AI?</a:t>
             </a:r>
             <a:endParaRPr lang="en-US" sz="1500" b="0" u="none" strike="noStrike">
               <a:solidFill>
@@ -25793,102 +25864,327 @@
             </a:endParaRPr>
           </a:p>
           <a:p>
-            <a:pPr marL="685800" lvl="1" indent="-343080" defTabSz="914400">
-              <a:lnSpc>
-                <a:spcPct val="100000"/>
-              </a:lnSpc>
-              <a:spcAft>
-                <a:spcPts val="400"/>
-              </a:spcAft>
+            <a:pPr marL="360000" defTabSz="914400">
+              <a:lnSpc>
+                <a:spcPct val="100000"/>
+              </a:lnSpc>
               <a:buClr>
-                <a:srgbClr val="64748B"/>
+                <a:srgbClr val="0F2B5B"/>
               </a:buClr>
               <a:buFont typeface="Symbol" charset="2"/>
               <a:buChar char=""/>
             </a:pPr>
             <a:r>
-              <a:rPr lang="en-US" sz="1300" b="0" u="none" strike="noStrike">
-                <a:solidFill>
-                  <a:srgbClr val="64748B"/>
-                </a:solidFill>
-                <a:effectLst/>
-                <a:uFillTx/>
-                <a:latin typeface="Calibri"/>
-                <a:ea typeface="Calibri"/>
-              </a:rPr>
-              <a:t>Agents, environments, percepts, and the agent function</a:t>
-            </a:r>
-            <a:endParaRPr lang="en-US" sz="1300" b="0" u="none" strike="noStrike">
-              <a:solidFill>
-                <a:srgbClr val="000000"/>
-              </a:solidFill>
-              <a:effectLst/>
-              <a:uFillTx/>
-              <a:latin typeface="Arial"/>
-            </a:endParaRPr>
-          </a:p>
-          <a:p>
-            <a:pPr marL="685800" lvl="1" indent="-343080" defTabSz="914400">
-              <a:lnSpc>
-                <a:spcPct val="100000"/>
-              </a:lnSpc>
-              <a:spcAft>
-                <a:spcPts val="400"/>
-              </a:spcAft>
+              <a:rPr lang="en-US" sz="1500" b="1" u="none" strike="noStrike">
+                <a:solidFill>
+                  <a:srgbClr val="0F2B5B"/>
+                </a:solidFill>
+                <a:effectLst/>
+                <a:uFillTx/>
+                <a:latin typeface="Calibri"/>
+                <a:ea typeface="Calibri"/>
+              </a:rPr>
+              <a:t>Foundations of AI</a:t>
+            </a:r>
+            <a:endParaRPr lang="en-US" sz="1500" b="0" u="none" strike="noStrike">
+              <a:solidFill>
+                <a:srgbClr val="000000"/>
+              </a:solidFill>
+              <a:effectLst/>
+              <a:uFillTx/>
+              <a:latin typeface="Arial"/>
+            </a:endParaRPr>
+          </a:p>
+          <a:p>
+            <a:pPr marL="360000" defTabSz="914400">
+              <a:lnSpc>
+                <a:spcPct val="100000"/>
+              </a:lnSpc>
               <a:buClr>
-                <a:srgbClr val="64748B"/>
+                <a:srgbClr val="0F2B5B"/>
               </a:buClr>
               <a:buFont typeface="Symbol" charset="2"/>
               <a:buChar char=""/>
             </a:pPr>
             <a:r>
-              <a:rPr lang="en-US" sz="1300" b="0" u="none" strike="noStrike">
-                <a:solidFill>
-                  <a:srgbClr val="64748B"/>
-                </a:solidFill>
-                <a:effectLst/>
-                <a:uFillTx/>
-                <a:latin typeface="Calibri"/>
-                <a:ea typeface="Calibri"/>
-              </a:rPr>
-              <a:t>Rationality, PEAS, and task environment properties</a:t>
-            </a:r>
-            <a:endParaRPr lang="en-US" sz="1300" b="0" u="none" strike="noStrike">
-              <a:solidFill>
-                <a:srgbClr val="000000"/>
-              </a:solidFill>
-              <a:effectLst/>
-              <a:uFillTx/>
-              <a:latin typeface="Arial"/>
-            </a:endParaRPr>
-          </a:p>
-          <a:p>
-            <a:pPr marL="685800" lvl="1" indent="-343080" defTabSz="914400">
-              <a:lnSpc>
-                <a:spcPct val="100000"/>
-              </a:lnSpc>
-              <a:spcAft>
-                <a:spcPts val="400"/>
-              </a:spcAft>
+              <a:rPr lang="en-US" sz="1500" b="1" u="none" strike="noStrike">
+                <a:solidFill>
+                  <a:srgbClr val="0F2B5B"/>
+                </a:solidFill>
+                <a:effectLst/>
+                <a:uFillTx/>
+                <a:latin typeface="Calibri"/>
+                <a:ea typeface="Calibri"/>
+              </a:rPr>
+              <a:t>History and Applications</a:t>
+            </a:r>
+            <a:endParaRPr lang="en-US" sz="1500" b="0" u="none" strike="noStrike">
+              <a:solidFill>
+                <a:srgbClr val="000000"/>
+              </a:solidFill>
+              <a:effectLst/>
+              <a:uFillTx/>
+              <a:latin typeface="Arial"/>
+            </a:endParaRPr>
+          </a:p>
+          <a:p>
+            <a:pPr marL="360000" defTabSz="914400">
+              <a:lnSpc>
+                <a:spcPct val="100000"/>
+              </a:lnSpc>
               <a:buClr>
-                <a:srgbClr val="64748B"/>
+                <a:srgbClr val="0F2B5B"/>
               </a:buClr>
               <a:buFont typeface="Symbol" charset="2"/>
               <a:buChar char=""/>
             </a:pPr>
             <a:r>
-              <a:rPr lang="en-US" sz="1300" b="0" u="none" strike="noStrike">
-                <a:solidFill>
-                  <a:srgbClr val="64748B"/>
-                </a:solidFill>
-                <a:effectLst/>
-                <a:uFillTx/>
-                <a:latin typeface="Calibri"/>
-                <a:ea typeface="Calibri"/>
-              </a:rPr>
-              <a:t>Five agent architectures and representation schemes</a:t>
-            </a:r>
-            <a:endParaRPr lang="en-US" sz="1300" b="0" u="none" strike="noStrike">
+              <a:rPr lang="en-US" sz="1500" b="1" u="none" strike="noStrike">
+                <a:solidFill>
+                  <a:srgbClr val="0F2B5B"/>
+                </a:solidFill>
+                <a:effectLst/>
+                <a:uFillTx/>
+                <a:latin typeface="Calibri"/>
+                <a:ea typeface="Calibri"/>
+              </a:rPr>
+              <a:t>Risks and Ethics</a:t>
+            </a:r>
+            <a:endParaRPr lang="en-US" sz="1500" b="0" u="none" strike="noStrike">
+              <a:solidFill>
+                <a:srgbClr val="000000"/>
+              </a:solidFill>
+              <a:effectLst/>
+              <a:uFillTx/>
+              <a:latin typeface="Arial"/>
+            </a:endParaRPr>
+          </a:p>
+          <a:p>
+            <a:pPr defTabSz="914400">
+              <a:lnSpc>
+                <a:spcPct val="100000"/>
+              </a:lnSpc>
+            </a:pPr>
+            <a:endParaRPr lang="en-US" sz="1500" b="0" u="none" strike="noStrike">
+              <a:solidFill>
+                <a:srgbClr val="000000"/>
+              </a:solidFill>
+              <a:effectLst/>
+              <a:uFillTx/>
+              <a:latin typeface="Arial"/>
+            </a:endParaRPr>
+          </a:p>
+          <a:p>
+            <a:pPr defTabSz="914400">
+              <a:lnSpc>
+                <a:spcPct val="100000"/>
+              </a:lnSpc>
+            </a:pPr>
+            <a:r>
+              <a:rPr lang="en-US" sz="1500" b="1" u="none" strike="noStrike">
+                <a:solidFill>
+                  <a:srgbClr val="0F2B5B"/>
+                </a:solidFill>
+                <a:effectLst/>
+                <a:uFillTx/>
+                <a:latin typeface="Calibri"/>
+                <a:ea typeface="Calibri"/>
+              </a:rPr>
+              <a:t>Part 2 — Chapter 2: Intelligent Agents</a:t>
+            </a:r>
+            <a:endParaRPr lang="en-US" sz="1500" b="0" u="none" strike="noStrike">
+              <a:solidFill>
+                <a:srgbClr val="000000"/>
+              </a:solidFill>
+              <a:effectLst/>
+              <a:uFillTx/>
+              <a:latin typeface="Arial"/>
+            </a:endParaRPr>
+          </a:p>
+          <a:p>
+            <a:pPr marL="360000" defTabSz="914400">
+              <a:lnSpc>
+                <a:spcPct val="100000"/>
+              </a:lnSpc>
+              <a:buClr>
+                <a:srgbClr val="0F2B5B"/>
+              </a:buClr>
+              <a:buFont typeface="Symbol" charset="2"/>
+              <a:buChar char=""/>
+            </a:pPr>
+            <a:r>
+              <a:rPr lang="en-US" sz="1500" b="1" u="none" strike="noStrike">
+                <a:solidFill>
+                  <a:srgbClr val="0F2B5B"/>
+                </a:solidFill>
+                <a:effectLst/>
+                <a:uFillTx/>
+                <a:latin typeface="Calibri"/>
+                <a:ea typeface="Calibri"/>
+              </a:rPr>
+              <a:t>Agents and Rationality</a:t>
+            </a:r>
+            <a:endParaRPr lang="en-US" sz="1500" b="0" u="none" strike="noStrike">
+              <a:solidFill>
+                <a:srgbClr val="000000"/>
+              </a:solidFill>
+              <a:effectLst/>
+              <a:uFillTx/>
+              <a:latin typeface="Arial"/>
+            </a:endParaRPr>
+          </a:p>
+          <a:p>
+            <a:pPr marL="360000" defTabSz="914400">
+              <a:lnSpc>
+                <a:spcPct val="100000"/>
+              </a:lnSpc>
+              <a:buClr>
+                <a:srgbClr val="0F2B5B"/>
+              </a:buClr>
+              <a:buFont typeface="Symbol" charset="2"/>
+              <a:buChar char=""/>
+            </a:pPr>
+            <a:r>
+              <a:rPr lang="en-US" sz="1500" b="1" u="none" strike="noStrike">
+                <a:solidFill>
+                  <a:srgbClr val="0F2B5B"/>
+                </a:solidFill>
+                <a:effectLst/>
+                <a:uFillTx/>
+                <a:latin typeface="Calibri"/>
+                <a:ea typeface="Calibri"/>
+              </a:rPr>
+              <a:t>PEAS Framework</a:t>
+            </a:r>
+            <a:endParaRPr lang="en-US" sz="1500" b="0" u="none" strike="noStrike">
+              <a:solidFill>
+                <a:srgbClr val="000000"/>
+              </a:solidFill>
+              <a:effectLst/>
+              <a:uFillTx/>
+              <a:latin typeface="Arial"/>
+            </a:endParaRPr>
+          </a:p>
+          <a:p>
+            <a:pPr marL="360000" defTabSz="914400">
+              <a:lnSpc>
+                <a:spcPct val="100000"/>
+              </a:lnSpc>
+              <a:buClr>
+                <a:srgbClr val="0F2B5B"/>
+              </a:buClr>
+              <a:buFont typeface="Symbol" charset="2"/>
+              <a:buChar char=""/>
+            </a:pPr>
+            <a:r>
+              <a:rPr lang="en-US" sz="1500" b="1" u="none" strike="noStrike">
+                <a:solidFill>
+                  <a:srgbClr val="0F2B5B"/>
+                </a:solidFill>
+                <a:effectLst/>
+                <a:uFillTx/>
+                <a:latin typeface="Calibri"/>
+                <a:ea typeface="Calibri"/>
+              </a:rPr>
+              <a:t>Task Environment Properties</a:t>
+            </a:r>
+            <a:endParaRPr lang="en-US" sz="1500" b="0" u="none" strike="noStrike">
+              <a:solidFill>
+                <a:srgbClr val="000000"/>
+              </a:solidFill>
+              <a:effectLst/>
+              <a:uFillTx/>
+              <a:latin typeface="Arial"/>
+            </a:endParaRPr>
+          </a:p>
+          <a:p>
+            <a:pPr marL="360000" defTabSz="914400">
+              <a:lnSpc>
+                <a:spcPct val="100000"/>
+              </a:lnSpc>
+              <a:buClr>
+                <a:srgbClr val="0F2B5B"/>
+              </a:buClr>
+              <a:buFont typeface="Symbol" charset="2"/>
+              <a:buChar char=""/>
+            </a:pPr>
+            <a:r>
+              <a:rPr lang="en-US" sz="1500" b="1" u="none" strike="noStrike">
+                <a:solidFill>
+                  <a:srgbClr val="0F2B5B"/>
+                </a:solidFill>
+                <a:effectLst/>
+                <a:uFillTx/>
+                <a:latin typeface="Calibri"/>
+                <a:ea typeface="Calibri"/>
+              </a:rPr>
+              <a:t>Agent Architectures</a:t>
+            </a:r>
+            <a:endParaRPr lang="en-US" sz="1500" b="0" u="none" strike="noStrike">
+              <a:solidFill>
+                <a:srgbClr val="000000"/>
+              </a:solidFill>
+              <a:effectLst/>
+              <a:uFillTx/>
+              <a:latin typeface="Arial"/>
+            </a:endParaRPr>
+          </a:p>
+          <a:p>
+            <a:pPr marL="360000" defTabSz="914400">
+              <a:lnSpc>
+                <a:spcPct val="100000"/>
+              </a:lnSpc>
+              <a:buClr>
+                <a:srgbClr val="0F2B5B"/>
+              </a:buClr>
+              <a:buFont typeface="Symbol" charset="2"/>
+              <a:buChar char=""/>
+            </a:pPr>
+            <a:r>
+              <a:rPr lang="en-US" sz="1500" b="1" u="none" strike="noStrike">
+                <a:solidFill>
+                  <a:srgbClr val="0F2B5B"/>
+                </a:solidFill>
+                <a:effectLst/>
+                <a:uFillTx/>
+                <a:latin typeface="Calibri"/>
+                <a:ea typeface="Calibri"/>
+              </a:rPr>
+              <a:t>Learning Agents</a:t>
+            </a:r>
+            <a:endParaRPr lang="en-US" sz="1500" b="0" u="none" strike="noStrike">
+              <a:solidFill>
+                <a:srgbClr val="000000"/>
+              </a:solidFill>
+              <a:effectLst/>
+              <a:uFillTx/>
+              <a:latin typeface="Arial"/>
+            </a:endParaRPr>
+          </a:p>
+          <a:p>
+            <a:pPr marL="360000" defTabSz="914400">
+              <a:lnSpc>
+                <a:spcPct val="100000"/>
+              </a:lnSpc>
+              <a:buClr>
+                <a:srgbClr val="0F2B5B"/>
+              </a:buClr>
+              <a:buFont typeface="Symbol" charset="2"/>
+              <a:buChar char=""/>
+            </a:pPr>
+            <a:r>
+              <a:rPr lang="en-US" sz="1500" b="1" u="none" strike="noStrike">
+                <a:solidFill>
+                  <a:srgbClr val="0F2B5B"/>
+                </a:solidFill>
+                <a:effectLst/>
+                <a:uFillTx/>
+                <a:latin typeface="Calibri"/>
+                <a:ea typeface="Calibri"/>
+              </a:rPr>
+              <a:t>Knowledge Representation</a:t>
+            </a:r>
+            <a:endParaRPr lang="en-US" sz="1500" b="0" u="none" strike="noStrike">
               <a:solidFill>
                 <a:srgbClr val="000000"/>
               </a:solidFill>
@@ -25945,7 +26241,7 @@
         <p:spPr>
           <a:xfrm>
             <a:off x="0" y="0"/>
-            <a:ext cx="9143280" cy="776520"/>
+            <a:ext cx="9142920" cy="776160"/>
           </a:xfrm>
           <a:prstGeom prst="rect">
             <a:avLst/>
@@ -25991,7 +26287,7 @@
         <p:spPr>
           <a:xfrm>
             <a:off x="0" y="777240"/>
-            <a:ext cx="9143280" cy="63360"/>
+            <a:ext cx="9142920" cy="63000"/>
           </a:xfrm>
           <a:prstGeom prst="rect">
             <a:avLst/>
@@ -26037,7 +26333,7 @@
         <p:spPr>
           <a:xfrm>
             <a:off x="320040" y="0"/>
-            <a:ext cx="8503200" cy="776520"/>
+            <a:ext cx="8502840" cy="776160"/>
           </a:xfrm>
           <a:prstGeom prst="rect">
             <a:avLst/>
@@ -26098,7 +26394,7 @@
         <p:spPr>
           <a:xfrm>
             <a:off x="365760" y="960120"/>
-            <a:ext cx="8411760" cy="3976920"/>
+            <a:ext cx="8411400" cy="3976560"/>
           </a:xfrm>
           <a:prstGeom prst="rect">
             <a:avLst/>
@@ -26656,7 +26952,7 @@
         <p:spPr>
           <a:xfrm>
             <a:off x="0" y="0"/>
-            <a:ext cx="163800" cy="5142960"/>
+            <a:ext cx="163440" cy="5142600"/>
           </a:xfrm>
           <a:prstGeom prst="rect">
             <a:avLst/>
@@ -26678,7 +26974,7 @@
           <a:fontRef idx="minor"/>
         </p:style>
         <p:txBody>
-          <a:bodyPr lIns="82080" tIns="45000" rIns="82080" bIns="45000" anchor="t">
+          <a:bodyPr lIns="81720" tIns="45000" rIns="81720" bIns="45000" anchor="t">
             <a:noAutofit/>
           </a:bodyPr>
           <a:p>
@@ -26702,7 +26998,7 @@
         <p:spPr>
           <a:xfrm>
             <a:off x="457200" y="228600"/>
-            <a:ext cx="8228880" cy="685080"/>
+            <a:ext cx="8228520" cy="684720"/>
           </a:xfrm>
           <a:prstGeom prst="rect">
             <a:avLst/>
@@ -26763,7 +27059,7 @@
         <p:spPr>
           <a:xfrm>
             <a:off x="457200" y="1005840"/>
-            <a:ext cx="8320320" cy="3931200"/>
+            <a:ext cx="8319960" cy="3930840"/>
           </a:xfrm>
           <a:prstGeom prst="rect">
             <a:avLst/>
@@ -27146,7 +27442,7 @@
         <p:spPr>
           <a:xfrm>
             <a:off x="0" y="0"/>
-            <a:ext cx="163800" cy="5142960"/>
+            <a:ext cx="163440" cy="5142600"/>
           </a:xfrm>
           <a:prstGeom prst="rect">
             <a:avLst/>
@@ -27168,7 +27464,7 @@
           <a:fontRef idx="minor"/>
         </p:style>
         <p:txBody>
-          <a:bodyPr lIns="82080" tIns="45000" rIns="82080" bIns="45000" anchor="t">
+          <a:bodyPr lIns="81720" tIns="45000" rIns="81720" bIns="45000" anchor="t">
             <a:noAutofit/>
           </a:bodyPr>
           <a:p>
@@ -27192,7 +27488,7 @@
         <p:spPr>
           <a:xfrm>
             <a:off x="457200" y="1371600"/>
-            <a:ext cx="8228880" cy="913680"/>
+            <a:ext cx="8228520" cy="913320"/>
           </a:xfrm>
           <a:prstGeom prst="rect">
             <a:avLst/>
@@ -27253,7 +27549,7 @@
         <p:spPr>
           <a:xfrm>
             <a:off x="457200" y="2468880"/>
-            <a:ext cx="8228880" cy="547920"/>
+            <a:ext cx="8228520" cy="547560"/>
           </a:xfrm>
           <a:prstGeom prst="rect">
             <a:avLst/>
@@ -27314,7 +27610,7 @@
         <p:spPr>
           <a:xfrm>
             <a:off x="457200" y="3063240"/>
-            <a:ext cx="8228880" cy="456480"/>
+            <a:ext cx="8228520" cy="456120"/>
           </a:xfrm>
           <a:prstGeom prst="rect">
             <a:avLst/>
@@ -27375,7 +27671,7 @@
         <p:spPr>
           <a:xfrm>
             <a:off x="457200" y="4480560"/>
-            <a:ext cx="8228880" cy="410760"/>
+            <a:ext cx="8228520" cy="410400"/>
           </a:xfrm>
           <a:prstGeom prst="rect">
             <a:avLst/>
@@ -27473,7 +27769,7 @@
         <p:spPr>
           <a:xfrm>
             <a:off x="0" y="0"/>
-            <a:ext cx="163800" cy="5142960"/>
+            <a:ext cx="163440" cy="5142600"/>
           </a:xfrm>
           <a:prstGeom prst="rect">
             <a:avLst/>
@@ -27495,7 +27791,7 @@
           <a:fontRef idx="minor"/>
         </p:style>
         <p:txBody>
-          <a:bodyPr lIns="82080" tIns="45000" rIns="82080" bIns="45000" anchor="t">
+          <a:bodyPr lIns="81720" tIns="45000" rIns="81720" bIns="45000" anchor="t">
             <a:noAutofit/>
           </a:bodyPr>
           <a:p>
@@ -27519,7 +27815,7 @@
         <p:spPr>
           <a:xfrm>
             <a:off x="457200" y="822960"/>
-            <a:ext cx="8228880" cy="502200"/>
+            <a:ext cx="8228520" cy="501840"/>
           </a:xfrm>
           <a:prstGeom prst="rect">
             <a:avLst/>
@@ -27580,7 +27876,7 @@
         <p:spPr>
           <a:xfrm>
             <a:off x="457200" y="1417320"/>
-            <a:ext cx="8228880" cy="1005120"/>
+            <a:ext cx="8228520" cy="1004760"/>
           </a:xfrm>
           <a:prstGeom prst="rect">
             <a:avLst/>
@@ -27641,7 +27937,7 @@
         <p:spPr>
           <a:xfrm>
             <a:off x="457200" y="2514600"/>
-            <a:ext cx="8228880" cy="456480"/>
+            <a:ext cx="8228520" cy="456120"/>
           </a:xfrm>
           <a:prstGeom prst="rect">
             <a:avLst/>
@@ -27662,14 +27958,6 @@
             <a:noAutofit/>
           </a:bodyPr>
           <a:p>
-            <a:pPr defTabSz="914400">
-              <a:lnSpc>
-                <a:spcPct val="100000"/>
-              </a:lnSpc>
-              <a:tabLst>
-                <a:tab pos="0" algn="l"/>
-              </a:tabLst>
-            </a:pPr>
             <a:endParaRPr lang="en-US" sz="1800" b="0" u="none" strike="noStrike">
               <a:solidFill>
                 <a:srgbClr val="FFFFFF"/>
@@ -27727,7 +28015,7 @@
         <p:spPr>
           <a:xfrm>
             <a:off x="0" y="0"/>
-            <a:ext cx="9143280" cy="776520"/>
+            <a:ext cx="9142920" cy="776160"/>
           </a:xfrm>
           <a:prstGeom prst="rect">
             <a:avLst/>
@@ -27773,7 +28061,7 @@
         <p:spPr>
           <a:xfrm>
             <a:off x="0" y="777240"/>
-            <a:ext cx="9143280" cy="63360"/>
+            <a:ext cx="9142920" cy="63000"/>
           </a:xfrm>
           <a:prstGeom prst="rect">
             <a:avLst/>
@@ -27819,7 +28107,7 @@
         <p:spPr>
           <a:xfrm>
             <a:off x="320040" y="0"/>
-            <a:ext cx="8503200" cy="776520"/>
+            <a:ext cx="8502840" cy="776160"/>
           </a:xfrm>
           <a:prstGeom prst="rect">
             <a:avLst/>
@@ -27880,7 +28168,7 @@
         <p:spPr>
           <a:xfrm>
             <a:off x="365760" y="960120"/>
-            <a:ext cx="8411760" cy="3976920"/>
+            <a:ext cx="8411400" cy="3976560"/>
           </a:xfrm>
           <a:prstGeom prst="rect">
             <a:avLst/>
@@ -27924,7 +28212,7 @@
                 <a:latin typeface="Calibri"/>
                 <a:ea typeface="Calibri"/>
               </a:rPr>
-              <a:t>AI is concerned with understanding AND building intelligent entities — machines that compute how to act effectively and safely</a:t>
+              <a:t>AI is concerned with understanding AND building intelligent entities; machines that compute how to act effectively and safely</a:t>
             </a:r>
             <a:endParaRPr lang="en-US" sz="1500" b="0" u="none" strike="noStrike">
               <a:solidFill>
@@ -28298,7 +28586,7 @@
         <p:spPr>
           <a:xfrm>
             <a:off x="0" y="0"/>
-            <a:ext cx="9143280" cy="776520"/>
+            <a:ext cx="9142920" cy="776160"/>
           </a:xfrm>
           <a:prstGeom prst="rect">
             <a:avLst/>
@@ -28344,7 +28632,7 @@
         <p:spPr>
           <a:xfrm>
             <a:off x="0" y="777240"/>
-            <a:ext cx="9143280" cy="63360"/>
+            <a:ext cx="9142920" cy="63000"/>
           </a:xfrm>
           <a:prstGeom prst="rect">
             <a:avLst/>
@@ -28390,7 +28678,7 @@
         <p:spPr>
           <a:xfrm>
             <a:off x="320040" y="0"/>
-            <a:ext cx="8503200" cy="776520"/>
+            <a:ext cx="8502840" cy="776160"/>
           </a:xfrm>
           <a:prstGeom prst="rect">
             <a:avLst/>
@@ -28451,7 +28739,7 @@
         <p:spPr>
           <a:xfrm>
             <a:off x="1371600" y="914400"/>
-            <a:ext cx="2742480" cy="319320"/>
+            <a:ext cx="2742120" cy="318960"/>
           </a:xfrm>
           <a:prstGeom prst="rect">
             <a:avLst/>
@@ -28512,7 +28800,7 @@
         <p:spPr>
           <a:xfrm>
             <a:off x="5029200" y="914400"/>
-            <a:ext cx="2742480" cy="319320"/>
+            <a:ext cx="2742120" cy="318960"/>
           </a:xfrm>
           <a:prstGeom prst="rect">
             <a:avLst/>
@@ -28572,8 +28860,8 @@
         </p:nvSpPr>
         <p:spPr>
           <a:xfrm rot="16200000">
-            <a:off x="0" y="1920960"/>
-            <a:ext cx="1096560" cy="319320"/>
+            <a:off x="0" y="1921320"/>
+            <a:ext cx="1096200" cy="318960"/>
           </a:xfrm>
           <a:prstGeom prst="rect">
             <a:avLst/>
@@ -28633,8 +28921,8 @@
         </p:nvSpPr>
         <p:spPr>
           <a:xfrm rot="16200000">
-            <a:off x="0" y="3658320"/>
-            <a:ext cx="1096560" cy="319320"/>
+            <a:off x="0" y="3658680"/>
+            <a:ext cx="1096200" cy="318960"/>
           </a:xfrm>
           <a:prstGeom prst="rect">
             <a:avLst/>
@@ -28695,7 +28983,7 @@
         <p:spPr>
           <a:xfrm>
             <a:off x="1005840" y="1280160"/>
-            <a:ext cx="3748320" cy="1553760"/>
+            <a:ext cx="3747960" cy="1553400"/>
           </a:xfrm>
           <a:prstGeom prst="rect">
             <a:avLst/>
@@ -28748,7 +29036,7 @@
         <p:spPr>
           <a:xfrm>
             <a:off x="1097280" y="1371600"/>
-            <a:ext cx="3565440" cy="410760"/>
+            <a:ext cx="3565080" cy="410400"/>
           </a:xfrm>
           <a:prstGeom prst="rect">
             <a:avLst/>
@@ -28809,7 +29097,7 @@
         <p:spPr>
           <a:xfrm>
             <a:off x="1097280" y="1737360"/>
-            <a:ext cx="3565440" cy="1005120"/>
+            <a:ext cx="3565080" cy="1004760"/>
           </a:xfrm>
           <a:prstGeom prst="rect">
             <a:avLst/>
@@ -28900,7 +29188,7 @@
         <p:spPr>
           <a:xfrm>
             <a:off x="5120640" y="1280160"/>
-            <a:ext cx="3748320" cy="1553760"/>
+            <a:ext cx="3747960" cy="1553400"/>
           </a:xfrm>
           <a:prstGeom prst="rect">
             <a:avLst/>
@@ -28953,7 +29241,7 @@
         <p:spPr>
           <a:xfrm>
             <a:off x="5212080" y="1371600"/>
-            <a:ext cx="3565440" cy="410760"/>
+            <a:ext cx="3565080" cy="410400"/>
           </a:xfrm>
           <a:prstGeom prst="rect">
             <a:avLst/>
@@ -29014,7 +29302,7 @@
         <p:spPr>
           <a:xfrm>
             <a:off x="5212080" y="1737360"/>
-            <a:ext cx="3565440" cy="1005120"/>
+            <a:ext cx="3565080" cy="1004760"/>
           </a:xfrm>
           <a:prstGeom prst="rect">
             <a:avLst/>
@@ -29105,7 +29393,7 @@
         <p:spPr>
           <a:xfrm>
             <a:off x="1005840" y="3017520"/>
-            <a:ext cx="3748320" cy="1553760"/>
+            <a:ext cx="3747960" cy="1553400"/>
           </a:xfrm>
           <a:prstGeom prst="rect">
             <a:avLst/>
@@ -29158,7 +29446,7 @@
         <p:spPr>
           <a:xfrm>
             <a:off x="1097280" y="3108960"/>
-            <a:ext cx="3565440" cy="410760"/>
+            <a:ext cx="3565080" cy="410400"/>
           </a:xfrm>
           <a:prstGeom prst="rect">
             <a:avLst/>
@@ -29219,7 +29507,7 @@
         <p:spPr>
           <a:xfrm>
             <a:off x="1097280" y="3474720"/>
-            <a:ext cx="3565440" cy="1005120"/>
+            <a:ext cx="3565080" cy="1004760"/>
           </a:xfrm>
           <a:prstGeom prst="rect">
             <a:avLst/>
@@ -29310,7 +29598,7 @@
         <p:spPr>
           <a:xfrm>
             <a:off x="5120640" y="3017520"/>
-            <a:ext cx="3748320" cy="1553760"/>
+            <a:ext cx="3747960" cy="1553400"/>
           </a:xfrm>
           <a:prstGeom prst="rect">
             <a:avLst/>
@@ -29363,7 +29651,7 @@
         <p:spPr>
           <a:xfrm>
             <a:off x="5212080" y="3108960"/>
-            <a:ext cx="3565440" cy="410760"/>
+            <a:ext cx="3565080" cy="410400"/>
           </a:xfrm>
           <a:prstGeom prst="rect">
             <a:avLst/>
@@ -29424,7 +29712,7 @@
         <p:spPr>
           <a:xfrm>
             <a:off x="5212080" y="3474720"/>
-            <a:ext cx="3565440" cy="1005120"/>
+            <a:ext cx="3565080" cy="1004760"/>
           </a:xfrm>
           <a:prstGeom prst="rect">
             <a:avLst/>
@@ -29552,7 +29840,7 @@
         <p:spPr>
           <a:xfrm>
             <a:off x="0" y="0"/>
-            <a:ext cx="9143280" cy="776520"/>
+            <a:ext cx="9142920" cy="776160"/>
           </a:xfrm>
           <a:prstGeom prst="rect">
             <a:avLst/>
@@ -29598,7 +29886,7 @@
         <p:spPr>
           <a:xfrm>
             <a:off x="0" y="777240"/>
-            <a:ext cx="9143280" cy="63360"/>
+            <a:ext cx="9142920" cy="63000"/>
           </a:xfrm>
           <a:prstGeom prst="rect">
             <a:avLst/>
@@ -29644,7 +29932,7 @@
         <p:spPr>
           <a:xfrm>
             <a:off x="320040" y="0"/>
-            <a:ext cx="8503200" cy="776520"/>
+            <a:ext cx="8502840" cy="776160"/>
           </a:xfrm>
           <a:prstGeom prst="rect">
             <a:avLst/>
@@ -29705,7 +29993,7 @@
         <p:spPr>
           <a:xfrm>
             <a:off x="365760" y="960120"/>
-            <a:ext cx="8411760" cy="3976920"/>
+            <a:ext cx="8411400" cy="3976560"/>
           </a:xfrm>
           <a:prstGeom prst="rect">
             <a:avLst/>
@@ -30193,7 +30481,7 @@
         <p:spPr>
           <a:xfrm>
             <a:off x="0" y="0"/>
-            <a:ext cx="9143280" cy="776520"/>
+            <a:ext cx="9142920" cy="776160"/>
           </a:xfrm>
           <a:prstGeom prst="rect">
             <a:avLst/>
@@ -30239,7 +30527,7 @@
         <p:spPr>
           <a:xfrm>
             <a:off x="0" y="777240"/>
-            <a:ext cx="9143280" cy="63360"/>
+            <a:ext cx="9142920" cy="63000"/>
           </a:xfrm>
           <a:prstGeom prst="rect">
             <a:avLst/>
@@ -30285,7 +30573,7 @@
         <p:spPr>
           <a:xfrm>
             <a:off x="320040" y="0"/>
-            <a:ext cx="8503200" cy="776520"/>
+            <a:ext cx="8502840" cy="776160"/>
           </a:xfrm>
           <a:prstGeom prst="rect">
             <a:avLst/>
@@ -30346,7 +30634,7 @@
         <p:spPr>
           <a:xfrm>
             <a:off x="365760" y="914400"/>
-            <a:ext cx="8411760" cy="3976920"/>
+            <a:ext cx="8411400" cy="3976560"/>
           </a:xfrm>
           <a:prstGeom prst="rect">
             <a:avLst/>
@@ -30976,7 +31264,7 @@
         <p:spPr>
           <a:xfrm>
             <a:off x="6545520" y="804960"/>
-            <a:ext cx="997920" cy="1252080"/>
+            <a:ext cx="997560" cy="1251720"/>
           </a:xfrm>
           <a:prstGeom prst="rect">
             <a:avLst/>
@@ -31000,7 +31288,7 @@
         <p:spPr>
           <a:xfrm>
             <a:off x="7746480" y="2057400"/>
-            <a:ext cx="939960" cy="1252080"/>
+            <a:ext cx="939600" cy="1251720"/>
           </a:xfrm>
           <a:prstGeom prst="rect">
             <a:avLst/>
@@ -31057,7 +31345,7 @@
         <p:spPr>
           <a:xfrm>
             <a:off x="0" y="0"/>
-            <a:ext cx="9143280" cy="776520"/>
+            <a:ext cx="9142920" cy="776160"/>
           </a:xfrm>
           <a:prstGeom prst="rect">
             <a:avLst/>
@@ -31103,7 +31391,7 @@
         <p:spPr>
           <a:xfrm>
             <a:off x="0" y="777240"/>
-            <a:ext cx="9143280" cy="63360"/>
+            <a:ext cx="9142920" cy="63000"/>
           </a:xfrm>
           <a:prstGeom prst="rect">
             <a:avLst/>
@@ -31149,7 +31437,7 @@
         <p:spPr>
           <a:xfrm>
             <a:off x="320040" y="0"/>
-            <a:ext cx="8503200" cy="776520"/>
+            <a:ext cx="8502840" cy="776160"/>
           </a:xfrm>
           <a:prstGeom prst="rect">
             <a:avLst/>
@@ -31210,7 +31498,7 @@
         <p:spPr>
           <a:xfrm>
             <a:off x="320040" y="1005840"/>
-            <a:ext cx="3931200" cy="3839760"/>
+            <a:ext cx="3930840" cy="3839400"/>
           </a:xfrm>
           <a:prstGeom prst="rect">
             <a:avLst/>
@@ -31263,7 +31551,7 @@
         <p:spPr>
           <a:xfrm>
             <a:off x="320040" y="1005840"/>
-            <a:ext cx="3931200" cy="410760"/>
+            <a:ext cx="3930840" cy="410400"/>
           </a:xfrm>
           <a:prstGeom prst="rect">
             <a:avLst/>
@@ -31309,7 +31597,7 @@
         <p:spPr>
           <a:xfrm>
             <a:off x="320040" y="1005840"/>
-            <a:ext cx="3931200" cy="410760"/>
+            <a:ext cx="3930840" cy="410400"/>
           </a:xfrm>
           <a:prstGeom prst="rect">
             <a:avLst/>
@@ -31370,7 +31658,7 @@
         <p:spPr>
           <a:xfrm>
             <a:off x="457200" y="1508760"/>
-            <a:ext cx="3656880" cy="3199680"/>
+            <a:ext cx="3656520" cy="3199320"/>
           </a:xfrm>
           <a:prstGeom prst="rect">
             <a:avLst/>
@@ -31519,7 +31807,7 @@
                 <a:latin typeface="Calibri"/>
                 <a:ea typeface="Calibri"/>
               </a:rPr>
-              <a:t>Turing (1936): Church-Turing thesis — defines computability</a:t>
+              <a:t>Turing (1936): Church-Turing thesis; defines computability</a:t>
             </a:r>
             <a:endParaRPr lang="en-US" sz="1300" b="0" u="none" strike="noStrike">
               <a:solidFill>
@@ -31611,7 +31899,7 @@
         <p:spPr>
           <a:xfrm>
             <a:off x="4892040" y="1005840"/>
-            <a:ext cx="3931200" cy="3839760"/>
+            <a:ext cx="3930840" cy="3839400"/>
           </a:xfrm>
           <a:prstGeom prst="rect">
             <a:avLst/>
@@ -31664,7 +31952,7 @@
         <p:spPr>
           <a:xfrm>
             <a:off x="4892040" y="1005840"/>
-            <a:ext cx="3931200" cy="410760"/>
+            <a:ext cx="3930840" cy="410400"/>
           </a:xfrm>
           <a:prstGeom prst="rect">
             <a:avLst/>
@@ -31710,7 +31998,7 @@
         <p:spPr>
           <a:xfrm>
             <a:off x="4892040" y="1005840"/>
-            <a:ext cx="3931200" cy="410760"/>
+            <a:ext cx="3930840" cy="410400"/>
           </a:xfrm>
           <a:prstGeom prst="rect">
             <a:avLst/>
@@ -31771,7 +32059,7 @@
         <p:spPr>
           <a:xfrm>
             <a:off x="5029200" y="1508760"/>
-            <a:ext cx="3656880" cy="3199680"/>
+            <a:ext cx="3656520" cy="3199320"/>
           </a:xfrm>
           <a:prstGeom prst="rect">
             <a:avLst/>
@@ -31850,7 +32138,7 @@
                 <a:latin typeface="Calibri"/>
                 <a:ea typeface="Calibri"/>
               </a:rPr>
-              <a:t>Bayes (1702): updating probabilities from evidence — Bayes' rule</a:t>
+              <a:t>Bayes (1702): updating probabilities from evidence; Bayes' rule</a:t>
             </a:r>
             <a:endParaRPr lang="en-US" sz="1300" b="0" u="none" strike="noStrike">
               <a:solidFill>
@@ -31920,7 +32208,7 @@
                 <a:latin typeface="Calibri"/>
                 <a:ea typeface="Calibri"/>
               </a:rPr>
-              <a:t>Fisher (1922): modern statistics — experiment design + analysis</a:t>
+              <a:t>Fisher (1922): modern statistics; experiment design + analysis</a:t>
             </a:r>
             <a:endParaRPr lang="en-US" sz="1300" b="0" u="none" strike="noStrike">
               <a:solidFill>
